--- a/slides/obfuscation-tax.pptx
+++ b/slides/obfuscation-tax.pptx
@@ -124,21 +124,21 @@
   <p:extLst>
     <p:ext uri="{521415D9-36F7-43E2-AB2F-B90AF26B5E84}">
       <p14:sectionLst xmlns:p14="http://schemas.microsoft.com/office/powerpoint/2010/main">
-        <p14:section name="Background" id="{7959da8d-bed4-20f0-b775-7c35305cb882}">
+        <p14:section name="Background" id="{a14e286c-0dad-ce1e-bd27-a0c798761caf}">
           <p14:sldIdLst>
             <p14:sldId id="256"/>
             <p14:sldId id="257"/>
             <p14:sldId id="258"/>
           </p14:sldIdLst>
         </p14:section>
-        <p14:section name="Design and preconditions" id="{9d94a8bd-67db-e6e0-b8ca-641b6e66d0b2}">
+        <p14:section name="Design and preconditions" id="{87505647-71b7-7d7f-e85b-60439619919c}">
           <p14:sldIdLst>
             <p14:sldId id="259"/>
             <p14:sldId id="260"/>
             <p14:sldId id="261"/>
           </p14:sldIdLst>
         </p14:section>
-        <p14:section name="The sweep and the turn" id="{9a3189db-202b-fd99-0602-95c48902783e}">
+        <p14:section name="The sweep and the turn" id="{2b8e50d0-ddec-fa90-427e-f61c0226ce57}">
           <p14:sldIdLst>
             <p14:sldId id="262"/>
             <p14:sldId id="263"/>
@@ -148,7 +148,7 @@
             <p14:sldId id="267"/>
           </p14:sldIdLst>
         </p14:section>
-        <p14:section name="What it means" id="{634a47c0-142d-94fb-d00a-2d59f5dac7f8}">
+        <p14:section name="What it means" id="{4a7d5f8e-2a10-07ac-28c6-4d420e89d420}">
           <p14:sldIdLst>
             <p14:sldId id="268"/>
             <p14:sldId id="269"/>
@@ -981,7 +981,7 @@
                 </a:solidFill>
                 <a:latin typeface="+mn-lt"/>
               </a:rPr>
-              <a:t>Both classes under the sandbagging prompt, out of fold</a:t>
+              <a:t>Within-prompt AUROC, out of fold, all fifteen cells</a:t>
             </a:r>
           </a:p>
         </c:rich>
@@ -992,9 +992,7 @@
     <c:autoTitleDeleted val="0"/>
     <c:plotArea>
       <c:layout/>
-      <c:barChart>
-        <c:barDir val="col"/>
-        <c:grouping val="clustered"/>
+      <c:lineChart>
         <c:varyColors val="0"/>
         <c:ser>
           <c:idx val="0"/>
@@ -1005,7 +1003,7 @@
               <c:strCache>
                 <c:ptCount val="1"/>
                 <c:pt idx="0">
-                  <c:v>Within-prompt AUROC</c:v>
+                  <c:v>last-pooled</c:v>
                 </c:pt>
               </c:strCache>
             </c:strRef>
@@ -1014,33 +1012,57 @@
             <a:solidFill>
               <a:srgbClr val="2E6E8E"/>
             </a:solidFill>
+            <a:ln w="38100" cap="flat">
+              <a:solidFill>
+                <a:srgbClr val="2E6E8E"/>
+              </a:solidFill>
+              <a:prstDash val="solid"/>
+              <a:round/>
+            </a:ln>
             <a:effectLst/>
           </c:spPr>
           <c:invertIfNegative val="0"/>
           <c:dLbls>
-            <c:numFmt formatCode="0.000" sourceLinked="0"/>
+            <c:numFmt formatCode="#,##0" sourceLinked="0"/>
             <c:txPr>
               <a:bodyPr/>
               <a:lstStyle/>
               <a:p>
                 <a:pPr>
-                  <a:defRPr b="0" i="0" strike="noStrike" sz="1000" u="none">
+                  <a:defRPr b="0" i="0" strike="noStrike" sz="1200" u="none">
                     <a:solidFill>
-                      <a:srgbClr val="1A2230"/>
+                      <a:srgbClr val="000000"/>
                     </a:solidFill>
-                    <a:latin typeface="+mn-lt"/>
+                    <a:latin typeface="Arial"/>
                   </a:defRPr>
                 </a:pPr>
               </a:p>
             </c:txPr>
             <c:showLegendKey val="0"/>
-            <c:showVal val="1"/>
+            <c:showVal val="0"/>
             <c:showCatName val="0"/>
             <c:showSerName val="0"/>
             <c:showPercent val="0"/>
             <c:showBubbleSize val="0"/>
             <c:showLeaderLines val="0"/>
           </c:dLbls>
+          <c:marker>
+            <c:symbol val="circle"/>
+            <c:size val="7"/>
+            <c:spPr>
+              <a:solidFill>
+                <a:srgbClr val="2E6E8E"/>
+              </a:solidFill>
+              <a:ln w="9525" cap="flat">
+                <a:solidFill>
+                  <a:srgbClr val="2E6E8E"/>
+                </a:solidFill>
+                <a:prstDash val="solid"/>
+                <a:round/>
+              </a:ln>
+              <a:effectLst/>
+            </c:spPr>
+          </c:marker>
           <c:cat>
             <c:multiLvlStrRef>
               <c:f>Sheet1!$A$2:$A$6</c:f>
@@ -1073,23 +1095,24 @@
                 <c:formatCode>General</c:formatCode>
                 <c:ptCount val="5"/>
                 <c:pt idx="0">
-                  <c:v>0.579</c:v>
+                  <c:v>0.571</c:v>
                 </c:pt>
                 <c:pt idx="1">
-                  <c:v>0.771</c:v>
+                  <c:v>0.847</c:v>
                 </c:pt>
                 <c:pt idx="2">
-                  <c:v>0.677</c:v>
+                  <c:v>0.859</c:v>
                 </c:pt>
                 <c:pt idx="3">
-                  <c:v>0.669</c:v>
+                  <c:v>0.823</c:v>
                 </c:pt>
                 <c:pt idx="4">
-                  <c:v>0.638</c:v>
+                  <c:v>0.819</c:v>
                 </c:pt>
               </c:numCache>
             </c:numRef>
           </c:val>
+          <c:smooth val="0"/>
         </c:ser>
         <c:ser>
           <c:idx val="1"/>
@@ -1100,42 +1123,66 @@
               <c:strCache>
                 <c:ptCount val="1"/>
                 <c:pt idx="0">
-                  <c:v>Label-shuffled null</c:v>
+                  <c:v>last32-pooled</c:v>
                 </c:pt>
               </c:strCache>
             </c:strRef>
           </c:tx>
           <c:spPr>
             <a:solidFill>
-              <a:srgbClr val="C8D3DC"/>
+              <a:srgbClr val="8A9BA8"/>
             </a:solidFill>
+            <a:ln w="38100" cap="flat">
+              <a:solidFill>
+                <a:srgbClr val="8A9BA8"/>
+              </a:solidFill>
+              <a:prstDash val="solid"/>
+              <a:round/>
+            </a:ln>
             <a:effectLst/>
           </c:spPr>
           <c:invertIfNegative val="0"/>
           <c:dLbls>
-            <c:numFmt formatCode="0.000" sourceLinked="0"/>
+            <c:numFmt formatCode="#,##0" sourceLinked="0"/>
             <c:txPr>
               <a:bodyPr/>
               <a:lstStyle/>
               <a:p>
                 <a:pPr>
-                  <a:defRPr b="0" i="0" strike="noStrike" sz="1000" u="none">
+                  <a:defRPr b="0" i="0" strike="noStrike" sz="1200" u="none">
                     <a:solidFill>
-                      <a:srgbClr val="1A2230"/>
+                      <a:srgbClr val="000000"/>
                     </a:solidFill>
-                    <a:latin typeface="+mn-lt"/>
+                    <a:latin typeface="Arial"/>
                   </a:defRPr>
                 </a:pPr>
               </a:p>
             </c:txPr>
             <c:showLegendKey val="0"/>
-            <c:showVal val="1"/>
+            <c:showVal val="0"/>
             <c:showCatName val="0"/>
             <c:showSerName val="0"/>
             <c:showPercent val="0"/>
             <c:showBubbleSize val="0"/>
             <c:showLeaderLines val="0"/>
           </c:dLbls>
+          <c:marker>
+            <c:symbol val="circle"/>
+            <c:size val="7"/>
+            <c:spPr>
+              <a:solidFill>
+                <a:srgbClr val="8A9BA8"/>
+              </a:solidFill>
+              <a:ln w="9525" cap="flat">
+                <a:solidFill>
+                  <a:srgbClr val="8A9BA8"/>
+                </a:solidFill>
+                <a:prstDash val="solid"/>
+                <a:round/>
+              </a:ln>
+              <a:effectLst/>
+            </c:spPr>
+          </c:marker>
           <c:cat>
             <c:multiLvlStrRef>
               <c:f>Sheet1!$A$2:$A$6</c:f>
@@ -1168,54 +1215,294 @@
                 <c:formatCode>General</c:formatCode>
                 <c:ptCount val="5"/>
                 <c:pt idx="0">
-                  <c:v>0.499</c:v>
+                  <c:v>0.587</c:v>
                 </c:pt>
                 <c:pt idx="1">
-                  <c:v>0.499</c:v>
+                  <c:v>0.804</c:v>
                 </c:pt>
                 <c:pt idx="2">
-                  <c:v>0.504</c:v>
+                  <c:v>0.714</c:v>
                 </c:pt>
                 <c:pt idx="3">
-                  <c:v>0.499</c:v>
+                  <c:v>0.727</c:v>
                 </c:pt>
                 <c:pt idx="4">
-                  <c:v>0.503</c:v>
+                  <c:v>0.694</c:v>
                 </c:pt>
               </c:numCache>
             </c:numRef>
           </c:val>
+          <c:smooth val="0"/>
+        </c:ser>
+        <c:ser>
+          <c:idx val="2"/>
+          <c:order val="2"/>
+          <c:tx>
+            <c:strRef>
+              <c:f>Sheet1!$D$1</c:f>
+              <c:strCache>
+                <c:ptCount val="1"/>
+                <c:pt idx="0">
+                  <c:v>mean-pooled (steered)</c:v>
+                </c:pt>
+              </c:strCache>
+            </c:strRef>
+          </c:tx>
+          <c:spPr>
+            <a:solidFill>
+              <a:srgbClr val="C2541B"/>
+            </a:solidFill>
+            <a:ln w="38100" cap="flat">
+              <a:solidFill>
+                <a:srgbClr val="C2541B"/>
+              </a:solidFill>
+              <a:prstDash val="solid"/>
+              <a:round/>
+            </a:ln>
+            <a:effectLst/>
+          </c:spPr>
+          <c:invertIfNegative val="0"/>
+          <c:dLbls>
+            <c:numFmt formatCode="#,##0" sourceLinked="0"/>
+            <c:txPr>
+              <a:bodyPr/>
+              <a:lstStyle/>
+              <a:p>
+                <a:pPr>
+                  <a:defRPr b="0" i="0" strike="noStrike" sz="1200" u="none">
+                    <a:solidFill>
+                      <a:srgbClr val="000000"/>
+                    </a:solidFill>
+                    <a:latin typeface="Arial"/>
+                  </a:defRPr>
+                </a:pPr>
+              </a:p>
+            </c:txPr>
+            <c:showLegendKey val="0"/>
+            <c:showVal val="0"/>
+            <c:showCatName val="0"/>
+            <c:showSerName val="0"/>
+            <c:showPercent val="0"/>
+            <c:showBubbleSize val="0"/>
+            <c:showLeaderLines val="0"/>
+          </c:dLbls>
+          <c:marker>
+            <c:symbol val="circle"/>
+            <c:size val="7"/>
+            <c:spPr>
+              <a:solidFill>
+                <a:srgbClr val="C2541B"/>
+              </a:solidFill>
+              <a:ln w="9525" cap="flat">
+                <a:solidFill>
+                  <a:srgbClr val="C2541B"/>
+                </a:solidFill>
+                <a:prstDash val="solid"/>
+                <a:round/>
+              </a:ln>
+              <a:effectLst/>
+            </c:spPr>
+          </c:marker>
+          <c:cat>
+            <c:multiLvlStrRef>
+              <c:f>Sheet1!$A$2:$A$6</c:f>
+              <c:multiLvlStrCache>
+                <c:ptCount val="5"/>
+                <c:lvl>
+                  <c:pt idx="0">
+                    <c:v>L12</c:v>
+                  </c:pt>
+                  <c:pt idx="1">
+                    <c:v>L16</c:v>
+                  </c:pt>
+                  <c:pt idx="2">
+                    <c:v>L20</c:v>
+                  </c:pt>
+                  <c:pt idx="3">
+                    <c:v>L24</c:v>
+                  </c:pt>
+                  <c:pt idx="4">
+                    <c:v>L28</c:v>
+                  </c:pt>
+                </c:lvl>
+              </c:multiLvlStrCache>
+            </c:multiLvlStrRef>
+          </c:cat>
+          <c:val>
+            <c:numRef>
+              <c:f>Sheet1!$D$2:$D$6</c:f>
+              <c:numCache>
+                <c:formatCode>General</c:formatCode>
+                <c:ptCount val="5"/>
+                <c:pt idx="0">
+                  <c:v>0.571</c:v>
+                </c:pt>
+                <c:pt idx="1">
+                  <c:v>0.769</c:v>
+                </c:pt>
+                <c:pt idx="2">
+                  <c:v>0.644</c:v>
+                </c:pt>
+                <c:pt idx="3">
+                  <c:v>0.645</c:v>
+                </c:pt>
+                <c:pt idx="4">
+                  <c:v>0.602</c:v>
+                </c:pt>
+              </c:numCache>
+            </c:numRef>
+          </c:val>
+          <c:smooth val="0"/>
+        </c:ser>
+        <c:ser>
+          <c:idx val="3"/>
+          <c:order val="3"/>
+          <c:tx>
+            <c:strRef>
+              <c:f>Sheet1!$E$1</c:f>
+              <c:strCache>
+                <c:ptCount val="1"/>
+                <c:pt idx="0">
+                  <c:v>shuffled-label null, 95th pct</c:v>
+                </c:pt>
+              </c:strCache>
+            </c:strRef>
+          </c:tx>
+          <c:spPr>
+            <a:solidFill>
+              <a:srgbClr val="C8D3DC"/>
+            </a:solidFill>
+            <a:ln w="38100" cap="flat">
+              <a:solidFill>
+                <a:srgbClr val="C8D3DC"/>
+              </a:solidFill>
+              <a:prstDash val="solid"/>
+              <a:round/>
+            </a:ln>
+            <a:effectLst/>
+          </c:spPr>
+          <c:invertIfNegative val="0"/>
+          <c:dLbls>
+            <c:numFmt formatCode="#,##0" sourceLinked="0"/>
+            <c:txPr>
+              <a:bodyPr/>
+              <a:lstStyle/>
+              <a:p>
+                <a:pPr>
+                  <a:defRPr b="0" i="0" strike="noStrike" sz="1200" u="none">
+                    <a:solidFill>
+                      <a:srgbClr val="000000"/>
+                    </a:solidFill>
+                    <a:latin typeface="Arial"/>
+                  </a:defRPr>
+                </a:pPr>
+              </a:p>
+            </c:txPr>
+            <c:showLegendKey val="0"/>
+            <c:showVal val="0"/>
+            <c:showCatName val="0"/>
+            <c:showSerName val="0"/>
+            <c:showPercent val="0"/>
+            <c:showBubbleSize val="0"/>
+            <c:showLeaderLines val="0"/>
+          </c:dLbls>
+          <c:marker>
+            <c:symbol val="circle"/>
+            <c:size val="7"/>
+            <c:spPr>
+              <a:solidFill>
+                <a:srgbClr val="C8D3DC"/>
+              </a:solidFill>
+              <a:ln w="9525" cap="flat">
+                <a:solidFill>
+                  <a:srgbClr val="C8D3DC"/>
+                </a:solidFill>
+                <a:prstDash val="solid"/>
+                <a:round/>
+              </a:ln>
+              <a:effectLst/>
+            </c:spPr>
+          </c:marker>
+          <c:cat>
+            <c:multiLvlStrRef>
+              <c:f>Sheet1!$A$2:$A$6</c:f>
+              <c:multiLvlStrCache>
+                <c:ptCount val="5"/>
+                <c:lvl>
+                  <c:pt idx="0">
+                    <c:v>L12</c:v>
+                  </c:pt>
+                  <c:pt idx="1">
+                    <c:v>L16</c:v>
+                  </c:pt>
+                  <c:pt idx="2">
+                    <c:v>L20</c:v>
+                  </c:pt>
+                  <c:pt idx="3">
+                    <c:v>L24</c:v>
+                  </c:pt>
+                  <c:pt idx="4">
+                    <c:v>L28</c:v>
+                  </c:pt>
+                </c:lvl>
+              </c:multiLvlStrCache>
+            </c:multiLvlStrRef>
+          </c:cat>
+          <c:val>
+            <c:numRef>
+              <c:f>Sheet1!$E$2:$E$6</c:f>
+              <c:numCache>
+                <c:formatCode>General</c:formatCode>
+                <c:ptCount val="5"/>
+                <c:pt idx="0">
+                  <c:v>0.616</c:v>
+                </c:pt>
+                <c:pt idx="1">
+                  <c:v>0.628</c:v>
+                </c:pt>
+                <c:pt idx="2">
+                  <c:v>0.634</c:v>
+                </c:pt>
+                <c:pt idx="3">
+                  <c:v>0.647</c:v>
+                </c:pt>
+                <c:pt idx="4">
+                  <c:v>0.636</c:v>
+                </c:pt>
+              </c:numCache>
+            </c:numRef>
+          </c:val>
+          <c:smooth val="0"/>
         </c:ser>
         <c:dLbls>
-          <c:numFmt formatCode="0.000" sourceLinked="0"/>
+          <c:numFmt formatCode="#,##0" sourceLinked="0"/>
           <c:txPr>
             <a:bodyPr/>
             <a:lstStyle/>
             <a:p>
               <a:pPr>
-                <a:defRPr b="0" i="0" strike="noStrike" sz="1000" u="none">
+                <a:defRPr b="0" i="0" strike="noStrike" sz="1200" u="none">
                   <a:solidFill>
-                    <a:srgbClr val="1A2230"/>
+                    <a:srgbClr val="000000"/>
                   </a:solidFill>
-                  <a:latin typeface="+mn-lt"/>
+                  <a:latin typeface="Arial"/>
                 </a:defRPr>
               </a:pPr>
             </a:p>
           </c:txPr>
           <c:showLegendKey val="0"/>
-          <c:showVal val="1"/>
+          <c:showVal val="0"/>
           <c:showCatName val="0"/>
           <c:showSerName val="0"/>
           <c:showPercent val="0"/>
           <c:showBubbleSize val="0"/>
           <c:showLeaderLines val="0"/>
         </c:dLbls>
-        <c:gapWidth val="45"/>
-        <c:overlap val="0"/>
+        <c:marker val="1"/>
         <c:axId val="2094734554"/>
         <c:axId val="2094734552"/>
         <c:axId val="2094734556"/>
-      </c:barChart>
+      </c:lineChart>
       <c:catAx>
         <c:axId val="2094734554"/>
         <c:scaling>
@@ -1261,8 +1548,8 @@
         <c:axId val="2094734552"/>
         <c:scaling>
           <c:orientation val="minMax"/>
-          <c:max val="1"/>
-          <c:min val="0"/>
+          <c:max val="0.9"/>
+          <c:min val="0.5"/>
         </c:scaling>
         <c:delete val="0"/>
         <c:axPos val="l"/>
@@ -1308,7 +1595,7 @@
         <c:crossAx val="2094734554"/>
         <c:crosses val="autoZero"/>
         <c:crossBetween val="between"/>
-        <c:majorUnit val="0.25"/>
+        <c:majorUnit val="0.1"/>
       </c:valAx>
       <c:spPr>
         <a:noFill/>
@@ -1326,7 +1613,7 @@
         <a:lstStyle/>
         <a:p>
           <a:pPr>
-            <a:defRPr sz="1100">
+            <a:defRPr sz="1050">
               <a:solidFill>
                 <a:srgbClr val="4A5663"/>
               </a:solidFill>
@@ -2013,7 +2300,7 @@
           <a:p>
             <a:r>
               <a:rPr lang="en-US" dirty="0"/>
-              <a:t>Our across-prompt grid was saturated at 1.000, so it could not choose a layer. This is the validation set we should have been sweeping.</a:t>
+              <a:t>A probe can separate a landed sabotage from an ignored instruction at 0.86, which is a usable detector rather than a confound. The earlier 0.771 figure came from reading only the mean-pooled row. The across-prompt grid reads 1.000 in all fifteen cells, so it cannot choose a layer and this grid is the one to sweep.</a:t>
             </a:r>
             <a:endParaRPr lang="en-US" dirty="0"/>
           </a:p>
@@ -2365,7 +2652,7 @@
           <a:p>
             <a:r>
               <a:rPr lang="en-US" dirty="0"/>
-              <a:t>Seven of these would have changed what we concluded without costing a single generation.</a:t>
+              <a:t>The seven on the left changed what we conclude without costing a single generation. Both notebooks now compute them during the run rather than needing a re-read afterwards, and the attack notebook asserts the alpha grid overlaps the informative window before it spends a pass.</a:t>
             </a:r>
             <a:endParaRPr lang="en-US" dirty="0"/>
           </a:p>
@@ -4264,7 +4551,7 @@
                   <a:srgbClr val="4A5663"/>
                 </a:solidFill>
               </a:rPr>
-              <a:t>Steering layer 20 drags layer 28 along at 2.8 per alpha, against 7.0 at the layer being steered. That ratio is what leaves a gap for the defender.</a:t>
+              <a:t>Steering layer 20 drags layer 28 along at 2.8 per alpha against 7.0 at the layer being steered, and that gap between the two rates is what the defender reads.</a:t>
             </a:r>
             <a:endParaRPr lang="en-US" sz="1350" dirty="0"/>
           </a:p>
@@ -5537,7 +5824,7 @@
                   <a:srgbClr val="4A5663"/>
                 </a:solidFill>
               </a:rPr>
-              <a:t>The accuracy drop reads 0.274, 0.288, 0.342, 0.274, 0.274. Flat. Taken at face value the attacker keeps everything.
+              <a:t>The accuracy drop reads 0.274, 0.288, 0.342, 0.274, 0.274, which is flat enough that the attacker appears to keep everything.
 </a:t>
             </a:r>
             <a:pPr indent="0" marL="0">
@@ -5654,7 +5941,7 @@
                   <a:srgbClr val="4A5663"/>
                 </a:solidFill>
               </a:rPr>
-              <a:t>Nine of the original twenty failures remain and eleven are new, with the valid rate still at 1.000. The rate is preserved and the attack is not.</a:t>
+              <a:t>Nine of the original twenty failures remain and eleven are new. The valid rate holds at 1.000 and the degenerate rate at 0.014, so the churn is not the model breaking down.</a:t>
             </a:r>
             <a:endParaRPr lang="en-US" sz="1250" dirty="0"/>
           </a:p>
@@ -5834,7 +6121,7 @@
                   <a:srgbClr val="1A2230"/>
                 </a:solidFill>
               </a:rPr>
-              <a:t>Real behavioural signal, at a layer we never attacked</a:t>
+              <a:t>The behavioural signal is stronger than we reported</a:t>
             </a:r>
             <a:endParaRPr lang="en-US" sz="2800" dirty="0"/>
           </a:p>
@@ -5906,19 +6193,19 @@
           <a:p>
             <a:pPr indent="0" marL="0">
               <a:lnSpc>
-                <a:spcPct val="124000"/>
+                <a:spcPct val="122000"/>
               </a:lnSpc>
               <a:buNone/>
             </a:pPr>
             <a:r>
-              <a:rPr lang="en-US" sz="1250" dirty="0">
+              <a:rPr lang="en-US" sz="1200" dirty="0">
                 <a:solidFill>
                   <a:srgbClr val="4A5663"/>
                 </a:solidFill>
               </a:rPr>
-              <a:t>Hold the prompt constant: both classes generated under the sandbagging instruction, labelled by whether the sabotage landed. Prompt identity then carries no information.</a:t>
-            </a:r>
-            <a:endParaRPr lang="en-US" sz="1250" dirty="0"/>
+              <a:t>Both classes are generated under the sandbagging instruction and labelled by whether the sabotage landed, so prompt identity carries no information and the control cannot fire. 35 sabotaged against 109 ignored.</a:t>
+            </a:r>
+            <a:endParaRPr lang="en-US" sz="1200" dirty="0"/>
           </a:p>
         </p:txBody>
       </p:sp>
@@ -5972,7 +6259,7 @@
           <a:p>
             <a:pPr indent="0" marL="0">
               <a:lnSpc>
-                <a:spcPct val="118000"/>
+                <a:spcPct val="116000"/>
               </a:lnSpc>
               <a:buNone/>
             </a:pPr>
@@ -5985,26 +6272,26 @@
                 <a:ea typeface="Cambria" pitchFamily="34" charset="-122"/>
                 <a:cs typeface="Cambria" pitchFamily="34" charset="-120"/>
               </a:rPr>
-              <a:t>0.771</a:t>
+              <a:t>0.859</a:t>
             </a:r>
             <a:pPr indent="0" marL="0">
               <a:lnSpc>
-                <a:spcPct val="118000"/>
+                <a:spcPct val="116000"/>
               </a:lnSpc>
               <a:buNone/>
             </a:pPr>
             <a:r>
-              <a:rPr lang="en-US" sz="1400" dirty="0">
+              <a:rPr lang="en-US" sz="1300" dirty="0">
                 <a:solidFill>
                   <a:srgbClr val="E7ECF1"/>
                 </a:solidFill>
               </a:rPr>
-              <a:t>  at layer 16
+              <a:t>  at layer 20, last-pooled
 </a:t>
             </a:r>
             <a:pPr indent="0" marL="0">
               <a:lnSpc>
-                <a:spcPct val="118000"/>
+                <a:spcPct val="116000"/>
               </a:lnSpc>
               <a:buNone/>
             </a:pPr>
@@ -6013,7 +6300,7 @@
           <a:p>
             <a:pPr indent="0" marL="0">
               <a:lnSpc>
-                <a:spcPct val="118000"/>
+                <a:spcPct val="116000"/>
               </a:lnSpc>
               <a:buNone/>
             </a:pPr>
@@ -6023,7 +6310,7 @@
                   <a:srgbClr val="9DADBC"/>
                 </a:solidFill>
               </a:rPr>
-              <a:t>Across-prompt reads 1.000 at every layer. That number is inflated rather than empty, and the signal peaks where the attack never went.</a:t>
+              <a:t>That is the layer we steered, under a pooling we did not. Mean-pooled at the same layer reads 0.644, so the sweep attacked the weaker of the two directions available there.</a:t>
             </a:r>
             <a:endParaRPr lang="en-US" sz="3400" dirty="0"/>
           </a:p>
@@ -6059,7 +6346,7 @@
                   <a:srgbClr val="6B7A88"/>
                 </a:solidFill>
               </a:rPr>
-              <a:t>Five-fold out-of-fold, null shuffled within behaviour. Goldowsky-Dill warned that adjacent layers vary this much.</a:t>
+              <a:t>Five folds, out of fold. The best cell's null over 500 shuffles: mean 0.501, 95th pct 0.628, max 0.729. Earlier write-ups quoted 0.771, which was the mean-pooled column alone.</a:t>
             </a:r>
             <a:endParaRPr lang="en-US" sz="1000" dirty="0"/>
           </a:p>
@@ -6866,7 +7153,7 @@
                 <a:ea typeface="Cambria" pitchFamily="34" charset="-122"/>
                 <a:cs typeface="Cambria" pitchFamily="34" charset="-120"/>
               </a:rPr>
-              <a:t>0.771</a:t>
+              <a:t>0.859</a:t>
             </a:r>
             <a:endParaRPr lang="en-US" sz="2600" dirty="0"/>
           </a:p>
@@ -6905,7 +7192,7 @@
                 <a:ea typeface="Cambria" pitchFamily="34" charset="-122"/>
                 <a:cs typeface="Cambria" pitchFamily="34" charset="-120"/>
               </a:rPr>
-              <a:t>Behavioural signal at layer 16</a:t>
+              <a:t>Behavioural signal at layer 20</a:t>
             </a:r>
             <a:endParaRPr lang="en-US" sz="1350" dirty="0"/>
           </a:p>
@@ -6944,7 +7231,7 @@
                   <a:srgbClr val="4A5663"/>
                 </a:solidFill>
               </a:rPr>
-              <a:t>Within-prompt, out of fold, against a shuffled null of 0.499 whose 95th percentile is 0.592. Layer 20, the one we attacked, reads 0.677.</a:t>
+              <a:t>Within-prompt, out of fold, last-pooled, against a null whose 95th percentile is 0.628 over 500 shuffles. Mean-pooled at the same layer reads 0.644.</a:t>
             </a:r>
             <a:endParaRPr lang="en-US" sz="1150" dirty="0"/>
           </a:p>
@@ -7541,7 +7828,7 @@
                   <a:srgbClr val="4A5663"/>
                 </a:solidFill>
               </a:rPr>
-              <a:t>The residual arithmetic, the two-sided AUROC, the Jaccard and the within-prompt probe all came off one npz, with no new GPU time.</a:t>
+              <a:t>The residual arithmetic, the two-sided AUROC, the Jaccard and the within-prompt grid all came off one npz, on CPU alone.</a:t>
             </a:r>
             <a:endParaRPr lang="en-US" sz="1100" dirty="0"/>
           </a:p>
@@ -7887,7 +8174,7 @@
                   <a:srgbClr val="4A5663"/>
                 </a:solidFill>
               </a:rPr>
-              <a:t>The probe reads which instruction was in the context. An attack and an ignored instruction sit 0.18 apart on a scale spanning 15.6.</a:t>
+              <a:t>The probe reads which instruction was in the context, and answer length alone scores 0.672 across prompts. Held constant, the headline cell falls from 1.000 to 0.644.</a:t>
             </a:r>
             <a:endParaRPr lang="en-US" sz="1150" dirty="0"/>
           </a:p>
@@ -8753,7 +9040,7 @@
                   <a:srgbClr val="C2541B"/>
                 </a:solidFill>
               </a:rPr>
-              <a:t>alpha 2 is [0.44, 0.71]</a:t>
+              <a:t>alpha 2 is [0.43, 0.71]</a:t>
             </a:r>
             <a:endParaRPr lang="en-US" sz="1150" dirty="0"/>
           </a:p>
@@ -8933,7 +9220,7 @@
                   <a:srgbClr val="2E6E8E"/>
                 </a:solidFill>
               </a:rPr>
-              <a:t>WHAT WE CAN IMPROVE</a:t>
+              <a:t>WHERE IT STANDS NOW</a:t>
             </a:r>
             <a:endParaRPr lang="en-US" sz="1100" dirty="0"/>
           </a:p>
@@ -8971,7 +9258,7 @@
                   <a:srgbClr val="1A2230"/>
                 </a:solidFill>
               </a:rPr>
-              <a:t>Eleven fixes, seven of them free</a:t>
+              <a:t>Seven fixes are in. Four need a re-run</a:t>
             </a:r>
             <a:endParaRPr lang="en-US" sz="2800" dirty="0"/>
           </a:p>
@@ -9031,10 +9318,10 @@
             <a:r>
               <a:rPr lang="en-US" sz="1200" b="1" dirty="0">
                 <a:solidFill>
-                  <a:srgbClr val="6B7A88"/>
-                </a:solidFill>
-              </a:rPr>
-              <a:t>No new generation. The run is on disk.</a:t>
+                  <a:srgbClr val="2E6E8E"/>
+                </a:solidFill>
+              </a:rPr>
+              <a:t>Done, from the run already on disk</a:t>
             </a:r>
             <a:endParaRPr lang="en-US" sz="1200" dirty="0"/>
           </a:p>
@@ -9109,7 +9396,7 @@
                   <a:srgbClr val="4A5663"/>
                 </a:solidFill>
               </a:rPr>
-              <a:t>Make the within-prompt AUROC the headline, and choose the layer and pooling by it.</a:t>
+              <a:t>Within-prompt AUROC is the headline, and it picks the layer and pooling: L20 last-pooled at 0.859.</a:t>
             </a:r>
             <a:endParaRPr lang="en-US" sz="1100" dirty="0"/>
           </a:p>
@@ -9184,7 +9471,7 @@
                   <a:srgbClr val="4A5663"/>
                 </a:solidFill>
               </a:rPr>
-              <a:t>Add a two-sided AUROC on distance from the honest median, plus TPR at a fixed FPR.</a:t>
+              <a:t>Two-sided AUROC and TPR at 1% FPR. Alpha 4 and 8 go back to 1.000.</a:t>
             </a:r>
             <a:endParaRPr lang="en-US" sz="1100" dirty="0"/>
           </a:p>
@@ -9259,7 +9546,7 @@
                   <a:srgbClr val="4A5663"/>
                 </a:solidFill>
               </a:rPr>
-              <a:t>Add a residual column, realised minus predicted. Under 2% here, and it would have saved the sweep.</a:t>
+              <a:t>A residual column, realised minus predicted. It reads under 1.6% at every alpha.</a:t>
             </a:r>
             <a:endParaRPr lang="en-US" sz="1100" dirty="0"/>
           </a:p>
@@ -9334,7 +9621,7 @@
                   <a:srgbClr val="4A5663"/>
                 </a:solidFill>
               </a:rPr>
-              <a:t>Add the flip-set Jaccard against alpha 0.</a:t>
+              <a:t>Flip-set Jaccard against alpha 0, which falls to 0.29.</a:t>
             </a:r>
             <a:endParaRPr lang="en-US" sz="1100" dirty="0"/>
           </a:p>
@@ -9409,7 +9696,7 @@
                   <a:srgbClr val="4A5663"/>
                 </a:solidFill>
               </a:rPr>
-              <a:t>Report the defender's number: the minimum over alpha of the strongest two-sided AUROC.</a:t>
+              <a:t>The defender's number, minimised over alpha: 0.993.</a:t>
             </a:r>
             <a:endParaRPr lang="en-US" sz="1100" dirty="0"/>
           </a:p>
@@ -9484,7 +9771,7 @@
                   <a:srgbClr val="4A5663"/>
                 </a:solidFill>
               </a:rPr>
-              <a:t>Refit the probe on the 35 clean attacks.</a:t>
+              <a:t>A degeneracy check beyond compiling, flat at 0.014.</a:t>
             </a:r>
             <a:endParaRPr lang="en-US" sz="1100" dirty="0"/>
           </a:p>
@@ -9559,7 +9846,7 @@
                   <a:srgbClr val="4A5663"/>
                 </a:solidFill>
               </a:rPr>
-              <a:t>Put a confidence interval on every AUROC.</a:t>
+              <a:t>A stratified bootstrap interval on every AUROC.</a:t>
             </a:r>
             <a:endParaRPr lang="en-US" sz="1100" dirty="0"/>
           </a:p>
@@ -9700,7 +9987,7 @@
                   <a:srgbClr val="9DADBC"/>
                 </a:solidFill>
               </a:rPr>
-              <a:t>Compute the informative window from the fitted probe and assert the grid overlaps it: roughly 0, 1.0, 1.5, 2.0, 2.5, 3.0.</a:t>
+              <a:t>The notebook now computes the informative window from the fitted probe and asserts the grid overlaps it. It is set to 0, 1.0, 1.5, 2.0, 2.5, 3.0.</a:t>
             </a:r>
             <a:endParaRPr lang="en-US" sz="1100" dirty="0"/>
           </a:p>
@@ -9970,7 +10257,7 @@
                   <a:srgbClr val="6B7A88"/>
                 </a:solidFill>
               </a:rPr>
-              <a:t>The seven on the left are re-reads of data already saved. The four on the right set the shape of the next run.</a:t>
+              <a:t>Left: src/obftax/metrics.py and scripts/reanalyze.py, both computed inline by the notebooks now. Right: the shape of the next run.</a:t>
             </a:r>
             <a:endParaRPr lang="en-US" sz="1000" dirty="0"/>
           </a:p>
@@ -10443,7 +10730,7 @@
                 <a:ea typeface="Cambria" pitchFamily="34" charset="-122"/>
                 <a:cs typeface="Cambria" pitchFamily="34" charset="-120"/>
               </a:rPr>
-              <a:t>Target the honest distribution</a:t>
+              <a:t>Measure the tax with best-of-n</a:t>
             </a:r>
             <a:endParaRPr lang="en-US" sz="1500" dirty="0"/>
           </a:p>
@@ -10482,7 +10769,7 @@
                   <a:srgbClr val="4A5663"/>
                 </a:solidFill>
               </a:rPr>
-              <a:t>A blind alpha overshoots. Pick alpha per example so the score lands on the honest median, or project rather than negate. About twenty lines with the hooks already in place.</a:t>
+              <a:t>Sample sixteen completions per problem under the sandbagging prompt, then sweep a probe-score budget instead of alpha: among completions quiet enough to pass, how many still sabotage? Every point is an output the model would really produce.</a:t>
             </a:r>
             <a:endParaRPr lang="en-US" sz="1200" dirty="0"/>
           </a:p>
@@ -10518,7 +10805,7 @@
                   <a:srgbClr val="2E6E8E"/>
                 </a:solidFill>
               </a:rPr>
-              <a:t>the attacker the literature actually studies</a:t>
+              <a:t>one pass, and both classes share one prompt</a:t>
             </a:r>
             <a:endParaRPr lang="en-US" sz="1100" dirty="0"/>
           </a:p>
@@ -10886,7 +11173,7 @@
                   <a:srgbClr val="4A5663"/>
                 </a:solidFill>
               </a:rPr>
-              <a:t>One scalar on one direction is the weakest adversary available, and a defence result against it says little. RL-Obfuscation is the comparison.</a:t>
+              <a:t>One scalar on one direction is the weakest adversary available, and a defence result against it says little. A soft prefix trained on the probe score plus the model's own sandbagged completion is the affordable version; RL-Obfuscation is the comparison.</a:t>
             </a:r>
             <a:endParaRPr lang="en-US" sz="1200" dirty="0"/>
           </a:p>
@@ -10922,7 +11209,7 @@
                   <a:srgbClr val="1A2230"/>
                 </a:solidFill>
               </a:rPr>
-              <a:t>a project rather than a run</a:t>
+              <a:t>hours on a 4B, not a project</a:t>
             </a:r>
             <a:endParaRPr lang="en-US" sz="1100" dirty="0"/>
           </a:p>
@@ -10958,7 +11245,7 @@
                   <a:srgbClr val="6B7A88"/>
                 </a:solidFill>
               </a:rPr>
-              <a:t>A change of substrate also helps: obfuscation_tax_refusal.ipynb puts both labels under one prompt on AdvBench and HarmBench.</a:t>
+              <a:t>A change of substrate helps too: on AdvBench or HarmBench both labels come from one prompt sampled k times, so the confound goes by construction rather than by control.</a:t>
             </a:r>
             <a:endParaRPr lang="en-US" sz="1000" dirty="0"/>
           </a:p>
@@ -11279,7 +11566,7 @@
                   <a:srgbClr val="7E8FA0"/>
                 </a:solidFill>
               </a:rPr>
-              <a:t>Full write-up in ANALYSIS.md  ·  one track only: mbpp, 300 problems, Qwen3.5-4B, reasoning off, greedy.</a:t>
+              <a:t>Corrected numbers in RESULTS.md, the narrative in ANALYSIS.md  ·  one track: mbpp, 300 problems, Qwen3.5-4B, reasoning off, greedy.</a:t>
             </a:r>
             <a:endParaRPr lang="en-US" sz="1100" dirty="0"/>
           </a:p>
@@ -15053,7 +15340,7 @@
                 <a:gridCol w="1188720"/>
                 <a:gridCol w="914400"/>
               </a:tblGrid>
-              <a:tr h="384048">
+              <a:tr h="347472">
                 <a:tc>
                   <a:txBody>
                     <a:bodyPr/>
@@ -15255,7 +15542,7 @@
                   </a:tcPr>
                 </a:tc>
               </a:tr>
-              <a:tr h="384048">
+              <a:tr h="347472">
                 <a:tc>
                   <a:txBody>
                     <a:bodyPr/>
@@ -15445,7 +15732,7 @@
                   </a:tcPr>
                 </a:tc>
               </a:tr>
-              <a:tr h="384048">
+              <a:tr h="347472">
                 <a:tc>
                   <a:txBody>
                     <a:bodyPr/>
@@ -15635,7 +15922,197 @@
                   </a:tcPr>
                 </a:tc>
               </a:tr>
-              <a:tr h="384048">
+              <a:tr h="347472">
+                <a:tc>
+                  <a:txBody>
+                    <a:bodyPr/>
+                    <a:lstStyle/>
+                    <a:p>
+                      <a:pPr indent="0" marL="0">
+                        <a:buNone/>
+                      </a:pPr>
+                      <a:r>
+                        <a:rPr lang="en-US" sz="1300" dirty="0">
+                          <a:solidFill>
+                            <a:srgbClr val="1A2230"/>
+                          </a:solidFill>
+                          <a:latin typeface="Calibri" pitchFamily="34" charset="0"/>
+                          <a:ea typeface="Calibri" pitchFamily="34" charset="-122"/>
+                          <a:cs typeface="Calibri" pitchFamily="34" charset="-120"/>
+                        </a:rPr>
+                        <a:t>Answer length alone</a:t>
+                      </a:r>
+                      <a:endParaRPr lang="en-US" sz="1300" dirty="0">
+                        <a:latin typeface="Calibri" charset="0"/>
+                        <a:ea typeface="Calibri" charset="0"/>
+                        <a:cs typeface="Calibri" charset="0"/>
+                      </a:endParaRPr>
+                    </a:p>
+                  </a:txBody>
+                  <a:tcPr marL="91440" marR="91440" marT="45720" marB="45720">
+                    <a:lnL w="0" cap="flat" cmpd="sng" algn="ctr">
+                      <a:noFill/>
+                    </a:lnL>
+                    <a:lnR w="0" cap="flat" cmpd="sng" algn="ctr">
+                      <a:noFill/>
+                    </a:lnR>
+                    <a:lnT w="0" cap="flat" cmpd="sng" algn="ctr">
+                      <a:noFill/>
+                    </a:lnT>
+                    <a:lnB w="6350" cap="flat" cmpd="sng" algn="ctr">
+                      <a:solidFill>
+                        <a:srgbClr val="D7DEE4"/>
+                      </a:solidFill>
+                      <a:prstDash val="solid"/>
+                      <a:round/>
+                      <a:headEnd type="none" w="med" len="med"/>
+                      <a:tailEnd type="none" w="med" len="med"/>
+                    </a:lnB>
+                  </a:tcPr>
+                </a:tc>
+                <a:tc>
+                  <a:txBody>
+                    <a:bodyPr/>
+                    <a:lstStyle/>
+                    <a:p>
+                      <a:pPr indent="0" marL="0">
+                        <a:buNone/>
+                      </a:pPr>
+                      <a:r>
+                        <a:rPr lang="en-US" sz="1300" dirty="0">
+                          <a:solidFill>
+                            <a:srgbClr val="1A2230"/>
+                          </a:solidFill>
+                          <a:latin typeface="Calibri" pitchFamily="34" charset="0"/>
+                          <a:ea typeface="Calibri" pitchFamily="34" charset="-122"/>
+                          <a:cs typeface="Calibri" pitchFamily="34" charset="-120"/>
+                        </a:rPr>
+                        <a:t>0.672</a:t>
+                      </a:r>
+                      <a:endParaRPr lang="en-US" sz="1300" dirty="0">
+                        <a:latin typeface="Calibri" charset="0"/>
+                        <a:ea typeface="Calibri" charset="0"/>
+                        <a:cs typeface="Calibri" charset="0"/>
+                      </a:endParaRPr>
+                    </a:p>
+                  </a:txBody>
+                  <a:tcPr marL="91440" marR="91440" marT="45720" marB="45720">
+                    <a:lnL w="0" cap="flat" cmpd="sng" algn="ctr">
+                      <a:noFill/>
+                    </a:lnL>
+                    <a:lnR w="0" cap="flat" cmpd="sng" algn="ctr">
+                      <a:noFill/>
+                    </a:lnR>
+                    <a:lnT w="0" cap="flat" cmpd="sng" algn="ctr">
+                      <a:noFill/>
+                    </a:lnT>
+                    <a:lnB w="6350" cap="flat" cmpd="sng" algn="ctr">
+                      <a:solidFill>
+                        <a:srgbClr val="D7DEE4"/>
+                      </a:solidFill>
+                      <a:prstDash val="solid"/>
+                      <a:round/>
+                      <a:headEnd type="none" w="med" len="med"/>
+                      <a:tailEnd type="none" w="med" len="med"/>
+                    </a:lnB>
+                  </a:tcPr>
+                </a:tc>
+                <a:tc>
+                  <a:txBody>
+                    <a:bodyPr/>
+                    <a:lstStyle/>
+                    <a:p>
+                      <a:pPr indent="0" marL="0">
+                        <a:buNone/>
+                      </a:pPr>
+                      <a:r>
+                        <a:rPr lang="en-US" sz="1300" dirty="0">
+                          <a:solidFill>
+                            <a:srgbClr val="1A2230"/>
+                          </a:solidFill>
+                          <a:latin typeface="Calibri" pitchFamily="34" charset="0"/>
+                          <a:ea typeface="Calibri" pitchFamily="34" charset="-122"/>
+                          <a:cs typeface="Calibri" pitchFamily="34" charset="-120"/>
+                        </a:rPr>
+                        <a:t>146 / 35</a:t>
+                      </a:r>
+                      <a:endParaRPr lang="en-US" sz="1300" dirty="0">
+                        <a:latin typeface="Calibri" charset="0"/>
+                        <a:ea typeface="Calibri" charset="0"/>
+                        <a:cs typeface="Calibri" charset="0"/>
+                      </a:endParaRPr>
+                    </a:p>
+                  </a:txBody>
+                  <a:tcPr marL="91440" marR="91440" marT="45720" marB="45720">
+                    <a:lnL w="0" cap="flat" cmpd="sng" algn="ctr">
+                      <a:noFill/>
+                    </a:lnL>
+                    <a:lnR w="0" cap="flat" cmpd="sng" algn="ctr">
+                      <a:noFill/>
+                    </a:lnR>
+                    <a:lnT w="0" cap="flat" cmpd="sng" algn="ctr">
+                      <a:noFill/>
+                    </a:lnT>
+                    <a:lnB w="6350" cap="flat" cmpd="sng" algn="ctr">
+                      <a:solidFill>
+                        <a:srgbClr val="D7DEE4"/>
+                      </a:solidFill>
+                      <a:prstDash val="solid"/>
+                      <a:round/>
+                      <a:headEnd type="none" w="med" len="med"/>
+                      <a:tailEnd type="none" w="med" len="med"/>
+                    </a:lnB>
+                  </a:tcPr>
+                </a:tc>
+                <a:tc>
+                  <a:txBody>
+                    <a:bodyPr/>
+                    <a:lstStyle/>
+                    <a:p>
+                      <a:pPr indent="0" marL="0">
+                        <a:buNone/>
+                      </a:pPr>
+                      <a:r>
+                        <a:rPr lang="en-US" sz="1300" dirty="0">
+                          <a:solidFill>
+                            <a:srgbClr val="6B7A88"/>
+                          </a:solidFill>
+                          <a:latin typeface="Calibri" pitchFamily="34" charset="0"/>
+                          <a:ea typeface="Calibri" pitchFamily="34" charset="-122"/>
+                          <a:cs typeface="Calibri" pitchFamily="34" charset="-120"/>
+                        </a:rPr>
+                        <a:t>near 0.5</a:t>
+                      </a:r>
+                      <a:endParaRPr lang="en-US" sz="1300" dirty="0">
+                        <a:latin typeface="Calibri" charset="0"/>
+                        <a:ea typeface="Calibri" charset="0"/>
+                        <a:cs typeface="Calibri" charset="0"/>
+                      </a:endParaRPr>
+                    </a:p>
+                  </a:txBody>
+                  <a:tcPr marL="91440" marR="91440" marT="45720" marB="45720">
+                    <a:lnL w="0" cap="flat" cmpd="sng" algn="ctr">
+                      <a:noFill/>
+                    </a:lnL>
+                    <a:lnR w="0" cap="flat" cmpd="sng" algn="ctr">
+                      <a:noFill/>
+                    </a:lnR>
+                    <a:lnT w="0" cap="flat" cmpd="sng" algn="ctr">
+                      <a:noFill/>
+                    </a:lnT>
+                    <a:lnB w="6350" cap="flat" cmpd="sng" algn="ctr">
+                      <a:solidFill>
+                        <a:srgbClr val="D7DEE4"/>
+                      </a:solidFill>
+                      <a:prstDash val="solid"/>
+                      <a:round/>
+                      <a:headEnd type="none" w="med" len="med"/>
+                      <a:tailEnd type="none" w="med" len="med"/>
+                    </a:lnB>
+                  </a:tcPr>
+                </a:tc>
+              </a:tr>
+              <a:tr h="347472">
                 <a:tc>
                   <a:txBody>
                     <a:bodyPr/>
@@ -15825,7 +16302,7 @@
                   </a:tcPr>
                 </a:tc>
               </a:tr>
-              <a:tr h="384048">
+              <a:tr h="347472">
                 <a:tc>
                   <a:txBody>
                     <a:bodyPr/>
@@ -16445,7 +16922,7 @@
         <p:spPr>
           <a:xfrm>
             <a:off x="896112" y="4535424"/>
-            <a:ext cx="10399471" cy="694944"/>
+            <a:ext cx="10399471" cy="786384"/>
           </a:xfrm>
           <a:prstGeom prst="rect">
             <a:avLst/>
@@ -16459,19 +16936,19 @@
           <a:p>
             <a:pPr indent="0" marL="0">
               <a:lnSpc>
-                <a:spcPct val="124000"/>
+                <a:spcPct val="120000"/>
               </a:lnSpc>
               <a:buNone/>
             </a:pPr>
             <a:r>
-              <a:rPr lang="en-US" sz="1300" dirty="0">
+              <a:rPr lang="en-US" sz="1250" dirty="0">
                 <a:solidFill>
                   <a:srgbClr val="9DADBC"/>
                 </a:solidFill>
               </a:rPr>
-              <a:t>An attack and a sandbag-prompted answer that came out correct sit 0.18 apart on a scale spanning 15.6. The sabotage is absent in one of them and the probe cannot tell. We noted that and continued, because the headline number was 1.000 and the attack machinery was already built.</a:t>
-            </a:r>
-            <a:endParaRPr lang="en-US" sz="1300" dirty="0"/>
+              <a:t>An attack and a sandbag-prompted answer that came out correct sit 0.18 apart on a scale spanning 15.6. Hold the prompt constant and the same cell drops from 1.000 to 0.644, against a shuffled-label null that reaches 0.634. Answer length does much of the rest: 0.672 across prompts, 0.516 within. We noted the control and continued, because the headline was 1.000 and the attack machinery was already built.</a:t>
+            </a:r>
+            <a:endParaRPr lang="en-US" sz="1250" dirty="0"/>
           </a:p>
         </p:txBody>
       </p:sp>
@@ -16505,7 +16982,7 @@
                   <a:srgbClr val="6B7A88"/>
                 </a:solidFill>
               </a:rPr>
-              <a:t>Source: results/pre_qwen35_4b_thinking_off_summary.json → controls</a:t>
+              <a:t>Mean answer tokens: honest-correct 43.8, sabotaged 59.1, instruction ignored 57.1. Mean pooling sees length.</a:t>
             </a:r>
             <a:endParaRPr lang="en-US" sz="1000" dirty="0"/>
           </a:p>
@@ -20933,7 +21410,7 @@
                   <a:srgbClr val="4A5663"/>
                 </a:solidFill>
               </a:rPr>
-              <a:t>0.604 two-sided, CI [0.47, 0.73], on 25 attacks.</a:t>
+              <a:t>0.604 two-sided, CI [0.48, 0.74], on 25 attacks.</a:t>
             </a:r>
             <a:endParaRPr lang="en-US" sz="2600" dirty="0"/>
           </a:p>
@@ -20950,7 +21427,7 @@
                   <a:srgbClr val="4A5663"/>
                 </a:solidFill>
               </a:rPr>
-              <a:t>TPR at 1% FPR drops to 0.040.</a:t>
+              <a:t>TPR at 1% FPR drops to 0.08.</a:t>
             </a:r>
             <a:endParaRPr lang="en-US" sz="2600" dirty="0"/>
           </a:p>
@@ -20986,7 +21463,7 @@
                   <a:srgbClr val="6B7A88"/>
                 </a:solidFill>
               </a:rPr>
-              <a:t>The attacker's best choice is interior: turning the dial up past the window makes the attack trivially detectable.</a:t>
+              <a:t>The attacker's best choice is interior. Past the window the dial makes the attack trivially detectable. Intervals: stratified bootstrap, 2000 resamples.</a:t>
             </a:r>
             <a:endParaRPr lang="en-US" sz="1000" dirty="0"/>
           </a:p>

--- a/slides/obfuscation-tax.pptx
+++ b/slides/obfuscation-tax.pptx
@@ -6,6 +6,7 @@
   </p:sldMasterIdLst>
   <p:sldIdLst>
     <p:sldId id="256" r:id="rId2"/>
+    <p:sldId id="261" r:id="rId12"/>
     <p:sldId id="257" r:id="rId3"/>
     <p:sldId id="258" r:id="rId4"/>
     <p:sldId id="259" r:id="rId5"/>
@@ -114,6 +115,7 @@
         <p14:section name="The question" id="{fc31c120-6cdf-9952-1e00-a06694114290}">
           <p14:sldIdLst>
             <p14:sldId id="256"/>
+            <p14:sldId id="261"/>
           </p14:sldIdLst>
         </p14:section>
         <p14:section name="Method" id="{bf58ce4e-cb23-b347-4a19-0bff9901ae94}">
@@ -908,6 +910,94 @@
             <a:fld id="{F7021451-1387-4CA6-816F-3879F97B5CBC}" type="slidenum">
               <a:rPr lang="en-US"/>
               <a:t>5</a:t>
+            </a:fld>
+            <a:endParaRPr lang="en-US"/>
+          </a:p>
+        </p:txBody>
+      </p:sp>
+    </p:spTree>
+    <p:extLst>
+      <p:ext uri="{BB962C8B-B14F-4D97-AF65-F5344CB8AC3E}">
+        <p14:creationId xmlns:p14="http://schemas.microsoft.com/office/powerpoint/2010/main" val="1024086991"/>
+      </p:ext>
+    </p:extLst>
+  </p:cSld>
+  <p:clrMapOvr>
+    <a:masterClrMapping/>
+  </p:clrMapOvr>
+</p:notes>
+</file>
+
+<file path=ppt/notesSlides/notesSlide6.xml><?xml version="1.0" encoding="utf-8"?>
+<p:notes xmlns:a="http://schemas.openxmlformats.org/drawingml/2006/main" xmlns:r="http://schemas.openxmlformats.org/officeDocument/2006/relationships" xmlns:p="http://schemas.openxmlformats.org/presentationml/2006/main">
+  <p:cSld>
+    <p:spTree>
+      <p:nvGrpSpPr>
+        <p:cNvPr id="1" name=""/>
+        <p:cNvGrpSpPr/>
+        <p:nvPr/>
+      </p:nvGrpSpPr>
+      <p:grpSpPr>
+        <a:xfrm>
+          <a:off x="0" y="0"/>
+          <a:ext cx="0" cy="0"/>
+          <a:chOff x="0" y="0"/>
+          <a:chExt cx="0" cy="0"/>
+        </a:xfrm>
+      </p:grpSpPr>
+      <p:sp>
+        <p:nvSpPr>
+          <p:cNvPr id="2" name="Slide Image Placeholder 1"/>
+          <p:cNvSpPr>
+            <a:spLocks noGrp="1" noRot="1" noChangeAspect="1"/>
+          </p:cNvSpPr>
+          <p:nvPr>
+            <p:ph type="sldImg"/>
+          </p:nvPr>
+        </p:nvSpPr>
+        <p:spPr/>
+      </p:sp>
+      <p:sp>
+        <p:nvSpPr>
+          <p:cNvPr id="3" name="Notes Placeholder 2"/>
+          <p:cNvSpPr>
+            <a:spLocks noGrp="1"/>
+          </p:cNvSpPr>
+          <p:nvPr>
+            <p:ph type="body" idx="1"/>
+          </p:nvPr>
+        </p:nvSpPr>
+        <p:spPr/>
+        <p:txBody>
+          <a:bodyPr/>
+          <a:lstStyle/>
+          <a:p>
+            <a:r>
+              <a:rPr lang="en-US" dirty="0"/>
+              <a:t>This is the comparison slide: the three papers' question, model, data and metrics against ours, columns only, no numbers. Read left to right along the Detection metric row and the columns agree: everyone reports recall or AUROC at a 1% false-positive rate, which is why ours does too. Read the Capability metric row and the three columns thin out. Paper 1 has nothing there by construction, since its model is not evading. Paper 2 names the SQL cost and gives no number. Paper 3 pays for behaviour with a quality term in the reward rather than measuring what evasion costs. The last column is the one that is new, and the rows below Detection are the whole contribution.</a:t>
+            </a:r>
+            <a:endParaRPr lang="en-US" dirty="0"/>
+          </a:p>
+        </p:txBody>
+      </p:sp>
+      <p:sp>
+        <p:nvSpPr>
+          <p:cNvPr id="4" name="Slide Number Placeholder 3"/>
+          <p:cNvSpPr>
+            <a:spLocks noGrp="1"/>
+          </p:cNvSpPr>
+          <p:nvPr>
+            <p:ph type="sldNum" sz="quarter" idx="10"/>
+          </p:nvPr>
+        </p:nvSpPr>
+        <p:spPr/>
+        <p:txBody>
+          <a:bodyPr/>
+          <a:lstStyle/>
+          <a:p>
+            <a:fld id="{F7021451-1387-4CA6-816F-3879F97B5CBC}" type="slidenum">
+              <a:rPr lang="en-US"/>
+              <a:t>2</a:t>
             </a:fld>
             <a:endParaRPr lang="en-US"/>
           </a:p>
@@ -9318,6 +9408,2073 @@
               <a:t>Corrected numbers in RESULTS.md, the narrative in ANALYSIS.md.</a:t>
             </a:r>
             <a:endParaRPr lang="en-US" sz="1050" dirty="0"/>
+          </a:p>
+        </p:txBody>
+      </p:sp>
+    </p:spTree>
+  </p:cSld>
+  <p:clrMapOvr>
+    <a:masterClrMapping/>
+  </p:clrMapOvr>
+</p:sld>
+</file>
+
+<file path=ppt/slides/slide6.xml><?xml version="1.0" encoding="utf-8"?>
+<p:sld xmlns:a="http://schemas.openxmlformats.org/drawingml/2006/main" xmlns:r="http://schemas.openxmlformats.org/officeDocument/2006/relationships" xmlns:p="http://schemas.openxmlformats.org/presentationml/2006/main">
+  <p:cSld name="Slide 6">
+    <p:spTree>
+      <p:nvGrpSpPr>
+        <p:cNvPr id="1" name=""/>
+        <p:cNvGrpSpPr/>
+        <p:nvPr/>
+      </p:nvGrpSpPr>
+      <p:grpSpPr>
+        <a:xfrm>
+          <a:off x="0" y="0"/>
+          <a:ext cx="0" cy="0"/>
+          <a:chOff x="0" y="0"/>
+          <a:chExt cx="0" cy="0"/>
+        </a:xfrm>
+      </p:grpSpPr>
+      <p:sp>
+        <p:nvSpPr>
+          <p:cNvPr id="2" name="eyebrow"/>
+          <p:cNvSpPr txBox="1"/>
+          <p:nvPr/>
+        </p:nvSpPr>
+        <p:spPr>
+          <a:xfrm>
+            <a:off x="566928" y="457200"/>
+            <a:ext cx="11054730" cy="237744"/>
+          </a:xfrm>
+          <a:prstGeom prst="rect">
+            <a:avLst/>
+          </a:prstGeom>
+          <a:noFill/>
+          <a:ln/>
+        </p:spPr>
+        <p:txBody>
+          <a:bodyPr wrap="square" lIns="0" tIns="0" rIns="0" bIns="0" rtlCol="0" anchor="ctr"/>
+          <a:lstStyle/>
+          <a:p>
+            <a:pPr indent="0" marL="0">
+              <a:buNone/>
+            </a:pPr>
+            <a:r>
+              <a:rPr lang="en-US" sz="1100" b="1" spc="160" kern="0" dirty="0">
+                <a:solidFill>
+                  <a:srgbClr val="C2541B"/>
+                </a:solidFill>
+              </a:rPr>
+              <a:t>WHERE THIS SITS</a:t>
+            </a:r>
+            <a:endParaRPr lang="en-US" sz="1100" dirty="0"/>
+          </a:p>
+        </p:txBody>
+      </p:sp>
+      <p:sp>
+        <p:nvSpPr>
+          <p:cNvPr id="3" name="Text 0"/>
+          <p:cNvSpPr/>
+          <p:nvPr>
+            <p:ph idx="100" type="title" hasCustomPrompt="1"/>
+          </p:nvPr>
+        </p:nvSpPr>
+        <p:spPr>
+          <a:xfrm>
+            <a:off x="566928" y="749808"/>
+            <a:ext cx="11054730" cy="658368"/>
+          </a:xfrm>
+          <a:prstGeom prst="rect">
+            <a:avLst/>
+          </a:prstGeom>
+          <a:noFill/>
+          <a:ln/>
+        </p:spPr>
+        <p:txBody>
+          <a:bodyPr wrap="square" rtlCol="0" anchor="t"/>
+          <a:lstStyle/>
+          <a:p>
+            <a:pPr indent="0" marL="0">
+              <a:buNone/>
+            </a:pPr>
+            <a:r>
+              <a:rPr lang="en-US" sz="2800" b="1" dirty="0">
+                <a:solidFill>
+                  <a:srgbClr val="1A2230"/>
+                </a:solidFill>
+              </a:rPr>
+              <a:t>What the three papers measured, and what this run measures</a:t>
+            </a:r>
+            <a:endParaRPr lang="en-US" sz="2800" dirty="0"/>
+          </a:p>
+        </p:txBody>
+      </p:sp>
+      <p:graphicFrame>
+        <p:nvGraphicFramePr>
+          <p:cNvPr id="4" name="comparison-table"/>
+          <p:cNvGraphicFramePr>
+            <a:graphicFrameLocks noGrp="1"/>
+          </p:cNvGraphicFramePr>
+          <p:nvPr/>
+        </p:nvGraphicFramePr>
+        <p:xfrm>
+          <a:off x="566928" y="1426464"/>
+          <a:ext cx="11054730" cy="4187952"/>
+        </p:xfrm>
+        <a:graphic>
+          <a:graphicData uri="http://schemas.openxmlformats.org/drawingml/2006/table">
+            <a:tbl>
+              <a:tblPr/>
+              <a:tblGrid>
+                <a:gridCol w="1481328"/>
+                <a:gridCol w="2249424"/>
+                <a:gridCol w="2249424"/>
+                <a:gridCol w="2249424"/>
+                <a:gridCol w="2825130"/>
+              </a:tblGrid>
+              <a:tr h="457200">
+                <a:tc>
+                  <a:txBody>
+                    <a:bodyPr/>
+                    <a:lstStyle/>
+                    <a:p>
+                      <a:pPr algn="l" indent="0" marL="0">
+                        <a:buNone/>
+                      </a:pPr>
+                      <a:endParaRPr lang="en-US" sz="1100" dirty="0">
+                        <a:latin typeface="Calibri" charset="0"/>
+                        <a:ea typeface="Calibri" charset="0"/>
+                        <a:cs typeface="Calibri" charset="0"/>
+                      </a:endParaRPr>
+                    </a:p>
+                  </a:txBody>
+                  <a:tcPr marL="91440" marR="91440" marT="45720" marB="45720">
+                    <a:lnL w="0" cap="flat" cmpd="sng" algn="ctr">
+                      <a:noFill/>
+                    </a:lnL>
+                    <a:lnR w="0" cap="flat" cmpd="sng" algn="ctr">
+                      <a:noFill/>
+                    </a:lnR>
+                    <a:lnT w="0" cap="flat" cmpd="sng" algn="ctr">
+                      <a:noFill/>
+                    </a:lnT>
+                    <a:lnB w="6350" cap="flat" cmpd="sng" algn="ctr">
+                      <a:solidFill>
+                        <a:srgbClr val="D7DEE4"/>
+                      </a:solidFill>
+                      <a:prstDash val="solid"/>
+                      <a:round/>
+                      <a:headEnd type="none" w="med" len="med"/>
+                      <a:tailEnd type="none" w="med" len="med"/>
+                    </a:lnB>
+                    <a:solidFill>
+                      <a:srgbClr val="FFFFFF"/>
+                    </a:solidFill>
+                  </a:tcPr>
+                </a:tc>
+                <a:tc>
+                  <a:txBody>
+                    <a:bodyPr/>
+                    <a:lstStyle/>
+                    <a:p>
+                      <a:pPr algn="l" indent="0" marL="0">
+                        <a:buNone/>
+                      </a:pPr>
+                      <a:r>
+                        <a:rPr lang="en-US" sz="1100" b="1" dirty="0">
+                          <a:solidFill>
+                            <a:srgbClr val="1A2230"/>
+                          </a:solidFill>
+                          <a:latin typeface="Calibri" pitchFamily="34" charset="0"/>
+                          <a:ea typeface="Calibri" pitchFamily="34" charset="-122"/>
+                          <a:cs typeface="Calibri" pitchFamily="34" charset="-120"/>
+                        </a:rPr>
+                        <a:t>Linear probes</a:t>
+                      </a:r>
+                      <a:endParaRPr lang="en-US" sz="1100" dirty="0">
+                        <a:latin typeface="Calibri" charset="0"/>
+                        <a:ea typeface="Calibri" charset="0"/>
+                        <a:cs typeface="Calibri" charset="0"/>
+                      </a:endParaRPr>
+                    </a:p>
+                    <a:p>
+                      <a:pPr algn="l" indent="0" marL="0">
+                        <a:buNone/>
+                      </a:pPr>
+                      <a:r>
+                        <a:rPr lang="en-US" sz="1000" dirty="0">
+                          <a:solidFill>
+                            <a:srgbClr val="6B7A88"/>
+                          </a:solidFill>
+                          <a:latin typeface="Calibri" pitchFamily="34" charset="0"/>
+                          <a:ea typeface="Calibri" pitchFamily="34" charset="-122"/>
+                          <a:cs typeface="Calibri" pitchFamily="34" charset="-120"/>
+                        </a:rPr>
+                        <a:t>Goldowsky-Dill et al., ICML 2025</a:t>
+                      </a:r>
+                      <a:endParaRPr lang="en-US" sz="1000" dirty="0">
+                        <a:latin typeface="Calibri" charset="0"/>
+                        <a:ea typeface="Calibri" charset="0"/>
+                        <a:cs typeface="Calibri" charset="0"/>
+                      </a:endParaRPr>
+                    </a:p>
+                  </a:txBody>
+                  <a:tcPr marL="91440" marR="91440" marT="45720" marB="45720">
+                    <a:lnL w="0" cap="flat" cmpd="sng" algn="ctr">
+                      <a:noFill/>
+                    </a:lnL>
+                    <a:lnR w="0" cap="flat" cmpd="sng" algn="ctr">
+                      <a:noFill/>
+                    </a:lnR>
+                    <a:lnT w="0" cap="flat" cmpd="sng" algn="ctr">
+                      <a:noFill/>
+                    </a:lnT>
+                    <a:lnB w="12700" cap="flat" cmpd="sng" algn="ctr">
+                      <a:solidFill>
+                        <a:srgbClr val="9DADBC"/>
+                      </a:solidFill>
+                      <a:prstDash val="solid"/>
+                      <a:round/>
+                      <a:headEnd type="none" w="med" len="med"/>
+                      <a:tailEnd type="none" w="med" len="med"/>
+                    </a:lnB>
+                    <a:solidFill>
+                      <a:srgbClr val="FFFFFF"/>
+                    </a:solidFill>
+                  </a:tcPr>
+                </a:tc>
+                <a:tc>
+                  <a:txBody>
+                    <a:bodyPr/>
+                    <a:lstStyle/>
+                    <a:p>
+                      <a:pPr algn="l" indent="0" marL="0">
+                        <a:buNone/>
+                      </a:pPr>
+                      <a:r>
+                        <a:rPr lang="en-US" sz="1100" b="1" dirty="0">
+                          <a:solidFill>
+                            <a:srgbClr val="1A2230"/>
+                          </a:solidFill>
+                          <a:latin typeface="Calibri" pitchFamily="34" charset="0"/>
+                          <a:ea typeface="Calibri" pitchFamily="34" charset="-122"/>
+                          <a:cs typeface="Calibri" pitchFamily="34" charset="-120"/>
+                        </a:rPr>
+                        <a:t>Obfuscated activations</a:t>
+                      </a:r>
+                      <a:endParaRPr lang="en-US" sz="1100" dirty="0">
+                        <a:latin typeface="Calibri" charset="0"/>
+                        <a:ea typeface="Calibri" charset="0"/>
+                        <a:cs typeface="Calibri" charset="0"/>
+                      </a:endParaRPr>
+                    </a:p>
+                    <a:p>
+                      <a:pPr algn="l" indent="0" marL="0">
+                        <a:buNone/>
+                      </a:pPr>
+                      <a:r>
+                        <a:rPr lang="en-US" sz="1000" dirty="0">
+                          <a:solidFill>
+                            <a:srgbClr val="6B7A88"/>
+                          </a:solidFill>
+                          <a:latin typeface="Calibri" pitchFamily="34" charset="0"/>
+                          <a:ea typeface="Calibri" pitchFamily="34" charset="-122"/>
+                          <a:cs typeface="Calibri" pitchFamily="34" charset="-120"/>
+                        </a:rPr>
+                        <a:t>Bailey et al., ICLR 2026</a:t>
+                      </a:r>
+                      <a:endParaRPr lang="en-US" sz="1000" dirty="0">
+                        <a:latin typeface="Calibri" charset="0"/>
+                        <a:ea typeface="Calibri" charset="0"/>
+                        <a:cs typeface="Calibri" charset="0"/>
+                      </a:endParaRPr>
+                    </a:p>
+                  </a:txBody>
+                  <a:tcPr marL="91440" marR="91440" marT="45720" marB="45720">
+                    <a:lnL w="0" cap="flat" cmpd="sng" algn="ctr">
+                      <a:noFill/>
+                    </a:lnL>
+                    <a:lnR w="0" cap="flat" cmpd="sng" algn="ctr">
+                      <a:noFill/>
+                    </a:lnR>
+                    <a:lnT w="0" cap="flat" cmpd="sng" algn="ctr">
+                      <a:noFill/>
+                    </a:lnT>
+                    <a:lnB w="12700" cap="flat" cmpd="sng" algn="ctr">
+                      <a:solidFill>
+                        <a:srgbClr val="9DADBC"/>
+                      </a:solidFill>
+                      <a:prstDash val="solid"/>
+                      <a:round/>
+                      <a:headEnd type="none" w="med" len="med"/>
+                      <a:tailEnd type="none" w="med" len="med"/>
+                    </a:lnB>
+                    <a:solidFill>
+                      <a:srgbClr val="FFFFFF"/>
+                    </a:solidFill>
+                  </a:tcPr>
+                </a:tc>
+                <a:tc>
+                  <a:txBody>
+                    <a:bodyPr/>
+                    <a:lstStyle/>
+                    <a:p>
+                      <a:pPr algn="l" indent="0" marL="0">
+                        <a:buNone/>
+                      </a:pPr>
+                      <a:r>
+                        <a:rPr lang="en-US" sz="1100" b="1" dirty="0">
+                          <a:solidFill>
+                            <a:srgbClr val="1A2230"/>
+                          </a:solidFill>
+                          <a:latin typeface="Calibri" pitchFamily="34" charset="0"/>
+                          <a:ea typeface="Calibri" pitchFamily="34" charset="-122"/>
+                          <a:cs typeface="Calibri" pitchFamily="34" charset="-120"/>
+                        </a:rPr>
+                        <a:t>RL-Obfuscation</a:t>
+                      </a:r>
+                      <a:endParaRPr lang="en-US" sz="1100" dirty="0">
+                        <a:latin typeface="Calibri" charset="0"/>
+                        <a:ea typeface="Calibri" charset="0"/>
+                        <a:cs typeface="Calibri" charset="0"/>
+                      </a:endParaRPr>
+                    </a:p>
+                    <a:p>
+                      <a:pPr algn="l" indent="0" marL="0">
+                        <a:buNone/>
+                      </a:pPr>
+                      <a:r>
+                        <a:rPr lang="en-US" sz="1000" dirty="0">
+                          <a:solidFill>
+                            <a:srgbClr val="6B7A88"/>
+                          </a:solidFill>
+                          <a:latin typeface="Calibri" pitchFamily="34" charset="0"/>
+                          <a:ea typeface="Calibri" pitchFamily="34" charset="-122"/>
+                          <a:cs typeface="Calibri" pitchFamily="34" charset="-120"/>
+                        </a:rPr>
+                        <a:t>Gupta and Jenner, 2025</a:t>
+                      </a:r>
+                      <a:endParaRPr lang="en-US" sz="1000" dirty="0">
+                        <a:latin typeface="Calibri" charset="0"/>
+                        <a:ea typeface="Calibri" charset="0"/>
+                        <a:cs typeface="Calibri" charset="0"/>
+                      </a:endParaRPr>
+                    </a:p>
+                  </a:txBody>
+                  <a:tcPr marL="91440" marR="91440" marT="45720" marB="45720">
+                    <a:lnL w="0" cap="flat" cmpd="sng" algn="ctr">
+                      <a:noFill/>
+                    </a:lnL>
+                    <a:lnR w="0" cap="flat" cmpd="sng" algn="ctr">
+                      <a:noFill/>
+                    </a:lnR>
+                    <a:lnT w="0" cap="flat" cmpd="sng" algn="ctr">
+                      <a:noFill/>
+                    </a:lnT>
+                    <a:lnB w="12700" cap="flat" cmpd="sng" algn="ctr">
+                      <a:solidFill>
+                        <a:srgbClr val="9DADBC"/>
+                      </a:solidFill>
+                      <a:prstDash val="solid"/>
+                      <a:round/>
+                      <a:headEnd type="none" w="med" len="med"/>
+                      <a:tailEnd type="none" w="med" len="med"/>
+                    </a:lnB>
+                    <a:solidFill>
+                      <a:srgbClr val="FFFFFF"/>
+                    </a:solidFill>
+                  </a:tcPr>
+                </a:tc>
+                <a:tc>
+                  <a:txBody>
+                    <a:bodyPr/>
+                    <a:lstStyle/>
+                    <a:p>
+                      <a:pPr algn="l" indent="0" marL="0">
+                        <a:buNone/>
+                      </a:pPr>
+                      <a:r>
+                        <a:rPr lang="en-US" sz="1100" b="1" dirty="0">
+                          <a:solidFill>
+                            <a:srgbClr val="C2541B"/>
+                          </a:solidFill>
+                          <a:latin typeface="Calibri" pitchFamily="34" charset="0"/>
+                          <a:ea typeface="Calibri" pitchFamily="34" charset="-122"/>
+                          <a:cs typeface="Calibri" pitchFamily="34" charset="-120"/>
+                        </a:rPr>
+                        <a:t>The obfuscation tax</a:t>
+                      </a:r>
+                      <a:endParaRPr lang="en-US" sz="1100" dirty="0">
+                        <a:latin typeface="Calibri" charset="0"/>
+                        <a:ea typeface="Calibri" charset="0"/>
+                        <a:cs typeface="Calibri" charset="0"/>
+                      </a:endParaRPr>
+                    </a:p>
+                    <a:p>
+                      <a:pPr algn="l" indent="0" marL="0">
+                        <a:buNone/>
+                      </a:pPr>
+                      <a:r>
+                        <a:rPr lang="en-US" sz="1000" dirty="0">
+                          <a:solidFill>
+                            <a:srgbClr val="6B7A88"/>
+                          </a:solidFill>
+                          <a:latin typeface="Calibri" pitchFamily="34" charset="0"/>
+                          <a:ea typeface="Calibri" pitchFamily="34" charset="-122"/>
+                          <a:cs typeface="Calibri" pitchFamily="34" charset="-120"/>
+                        </a:rPr>
+                        <a:t>this run</a:t>
+                      </a:r>
+                      <a:endParaRPr lang="en-US" sz="1000" dirty="0">
+                        <a:latin typeface="Calibri" charset="0"/>
+                        <a:ea typeface="Calibri" charset="0"/>
+                        <a:cs typeface="Calibri" charset="0"/>
+                      </a:endParaRPr>
+                    </a:p>
+                  </a:txBody>
+                  <a:tcPr marL="91440" marR="91440" marT="45720" marB="45720">
+                    <a:lnL w="0" cap="flat" cmpd="sng" algn="ctr">
+                      <a:noFill/>
+                    </a:lnL>
+                    <a:lnR w="0" cap="flat" cmpd="sng" algn="ctr">
+                      <a:noFill/>
+                    </a:lnR>
+                    <a:lnT w="0" cap="flat" cmpd="sng" algn="ctr">
+                      <a:noFill/>
+                    </a:lnT>
+                    <a:lnB w="12700" cap="flat" cmpd="sng" algn="ctr">
+                      <a:solidFill>
+                        <a:srgbClr val="9DADBC"/>
+                      </a:solidFill>
+                      <a:prstDash val="solid"/>
+                      <a:round/>
+                      <a:headEnd type="none" w="med" len="med"/>
+                      <a:tailEnd type="none" w="med" len="med"/>
+                    </a:lnB>
+                    <a:solidFill>
+                      <a:srgbClr val="F7E9E1"/>
+                    </a:solidFill>
+                  </a:tcPr>
+                </a:tc>
+              </a:tr>
+              <a:tr h="621792">
+                <a:tc>
+                  <a:txBody>
+                    <a:bodyPr/>
+                    <a:lstStyle/>
+                    <a:p>
+                      <a:pPr algn="l" indent="0" marL="0">
+                        <a:buNone/>
+                      </a:pPr>
+                      <a:r>
+                        <a:rPr lang="en-US" sz="1100" b="1" dirty="0">
+                          <a:solidFill>
+                            <a:srgbClr val="6B7A88"/>
+                          </a:solidFill>
+                          <a:latin typeface="Calibri" pitchFamily="34" charset="0"/>
+                          <a:ea typeface="Calibri" pitchFamily="34" charset="-122"/>
+                          <a:cs typeface="Calibri" pitchFamily="34" charset="-120"/>
+                        </a:rPr>
+                        <a:t>What it asks</a:t>
+                      </a:r>
+                      <a:endParaRPr lang="en-US" sz="1100" dirty="0">
+                        <a:latin typeface="Calibri" charset="0"/>
+                        <a:ea typeface="Calibri" charset="0"/>
+                        <a:cs typeface="Calibri" charset="0"/>
+                      </a:endParaRPr>
+                    </a:p>
+                  </a:txBody>
+                  <a:tcPr marL="91440" marR="91440" marT="45720" marB="45720">
+                    <a:lnL w="0" cap="flat" cmpd="sng" algn="ctr">
+                      <a:noFill/>
+                    </a:lnL>
+                    <a:lnR w="0" cap="flat" cmpd="sng" algn="ctr">
+                      <a:noFill/>
+                    </a:lnR>
+                    <a:lnT w="0" cap="flat" cmpd="sng" algn="ctr">
+                      <a:noFill/>
+                    </a:lnT>
+                    <a:lnB w="6350" cap="flat" cmpd="sng" algn="ctr">
+                      <a:solidFill>
+                        <a:srgbClr val="D7DEE4"/>
+                      </a:solidFill>
+                      <a:prstDash val="solid"/>
+                      <a:round/>
+                      <a:headEnd type="none" w="med" len="med"/>
+                      <a:tailEnd type="none" w="med" len="med"/>
+                    </a:lnB>
+                    <a:solidFill>
+                      <a:srgbClr val="FFFFFF"/>
+                    </a:solidFill>
+                  </a:tcPr>
+                </a:tc>
+                <a:tc>
+                  <a:txBody>
+                    <a:bodyPr/>
+                    <a:lstStyle/>
+                    <a:p>
+                      <a:pPr algn="l" indent="0" marL="0">
+                        <a:buNone/>
+                      </a:pPr>
+                      <a:r>
+                        <a:rPr lang="en-US" sz="1100" dirty="0">
+                          <a:solidFill>
+                            <a:srgbClr val="4A5663"/>
+                          </a:solidFill>
+                          <a:latin typeface="Calibri" pitchFamily="34" charset="0"/>
+                          <a:ea typeface="Calibri" pitchFamily="34" charset="-122"/>
+                          <a:cs typeface="Calibri" pitchFamily="34" charset="-120"/>
+                        </a:rPr>
+                        <a:t>Can a probe spot deception when the model is not hiding?</a:t>
+                      </a:r>
+                      <a:endParaRPr lang="en-US" sz="1100" dirty="0">
+                        <a:latin typeface="Calibri" charset="0"/>
+                        <a:ea typeface="Calibri" charset="0"/>
+                        <a:cs typeface="Calibri" charset="0"/>
+                      </a:endParaRPr>
+                    </a:p>
+                  </a:txBody>
+                  <a:tcPr marL="91440" marR="91440" marT="45720" marB="45720">
+                    <a:lnL w="0" cap="flat" cmpd="sng" algn="ctr">
+                      <a:noFill/>
+                    </a:lnL>
+                    <a:lnR w="0" cap="flat" cmpd="sng" algn="ctr">
+                      <a:noFill/>
+                    </a:lnR>
+                    <a:lnT w="0" cap="flat" cmpd="sng" algn="ctr">
+                      <a:noFill/>
+                    </a:lnT>
+                    <a:lnB w="6350" cap="flat" cmpd="sng" algn="ctr">
+                      <a:solidFill>
+                        <a:srgbClr val="D7DEE4"/>
+                      </a:solidFill>
+                      <a:prstDash val="solid"/>
+                      <a:round/>
+                      <a:headEnd type="none" w="med" len="med"/>
+                      <a:tailEnd type="none" w="med" len="med"/>
+                    </a:lnB>
+                    <a:solidFill>
+                      <a:srgbClr val="FFFFFF"/>
+                    </a:solidFill>
+                  </a:tcPr>
+                </a:tc>
+                <a:tc>
+                  <a:txBody>
+                    <a:bodyPr/>
+                    <a:lstStyle/>
+                    <a:p>
+                      <a:pPr algn="l" indent="0" marL="0">
+                        <a:buNone/>
+                      </a:pPr>
+                      <a:r>
+                        <a:rPr lang="en-US" sz="1100" dirty="0">
+                          <a:solidFill>
+                            <a:srgbClr val="4A5663"/>
+                          </a:solidFill>
+                          <a:latin typeface="Calibri" pitchFamily="34" charset="0"/>
+                          <a:ea typeface="Calibri" pitchFamily="34" charset="-122"/>
+                          <a:cs typeface="Calibri" pitchFamily="34" charset="-120"/>
+                        </a:rPr>
+                        <a:t>Can harmful behaviour run through latent states a monitor calls normal?</a:t>
+                      </a:r>
+                      <a:endParaRPr lang="en-US" sz="1100" dirty="0">
+                        <a:latin typeface="Calibri" charset="0"/>
+                        <a:ea typeface="Calibri" charset="0"/>
+                        <a:cs typeface="Calibri" charset="0"/>
+                      </a:endParaRPr>
+                    </a:p>
+                  </a:txBody>
+                  <a:tcPr marL="91440" marR="91440" marT="45720" marB="45720">
+                    <a:lnL w="0" cap="flat" cmpd="sng" algn="ctr">
+                      <a:noFill/>
+                    </a:lnL>
+                    <a:lnR w="0" cap="flat" cmpd="sng" algn="ctr">
+                      <a:noFill/>
+                    </a:lnR>
+                    <a:lnT w="0" cap="flat" cmpd="sng" algn="ctr">
+                      <a:noFill/>
+                    </a:lnT>
+                    <a:lnB w="6350" cap="flat" cmpd="sng" algn="ctr">
+                      <a:solidFill>
+                        <a:srgbClr val="D7DEE4"/>
+                      </a:solidFill>
+                      <a:prstDash val="solid"/>
+                      <a:round/>
+                      <a:headEnd type="none" w="med" len="med"/>
+                      <a:tailEnd type="none" w="med" len="med"/>
+                    </a:lnB>
+                    <a:solidFill>
+                      <a:srgbClr val="FFFFFF"/>
+                    </a:solidFill>
+                  </a:tcPr>
+                </a:tc>
+                <a:tc>
+                  <a:txBody>
+                    <a:bodyPr/>
+                    <a:lstStyle/>
+                    <a:p>
+                      <a:pPr algn="l" indent="0" marL="0">
+                        <a:buNone/>
+                      </a:pPr>
+                      <a:r>
+                        <a:rPr lang="en-US" sz="1100" dirty="0">
+                          <a:solidFill>
+                            <a:srgbClr val="4A5663"/>
+                          </a:solidFill>
+                          <a:latin typeface="Calibri" pitchFamily="34" charset="0"/>
+                          <a:ea typeface="Calibri" pitchFamily="34" charset="-122"/>
+                          <a:cs typeface="Calibri" pitchFamily="34" charset="-120"/>
+                        </a:rPr>
+                        <a:t>Can RL teach evasion with no gradient through the monitor?</a:t>
+                      </a:r>
+                      <a:endParaRPr lang="en-US" sz="1100" dirty="0">
+                        <a:latin typeface="Calibri" charset="0"/>
+                        <a:ea typeface="Calibri" charset="0"/>
+                        <a:cs typeface="Calibri" charset="0"/>
+                      </a:endParaRPr>
+                    </a:p>
+                  </a:txBody>
+                  <a:tcPr marL="91440" marR="91440" marT="45720" marB="45720">
+                    <a:lnL w="0" cap="flat" cmpd="sng" algn="ctr">
+                      <a:noFill/>
+                    </a:lnL>
+                    <a:lnR w="0" cap="flat" cmpd="sng" algn="ctr">
+                      <a:noFill/>
+                    </a:lnR>
+                    <a:lnT w="0" cap="flat" cmpd="sng" algn="ctr">
+                      <a:noFill/>
+                    </a:lnT>
+                    <a:lnB w="6350" cap="flat" cmpd="sng" algn="ctr">
+                      <a:solidFill>
+                        <a:srgbClr val="D7DEE4"/>
+                      </a:solidFill>
+                      <a:prstDash val="solid"/>
+                      <a:round/>
+                      <a:headEnd type="none" w="med" len="med"/>
+                      <a:tailEnd type="none" w="med" len="med"/>
+                    </a:lnB>
+                    <a:solidFill>
+                      <a:srgbClr val="FFFFFF"/>
+                    </a:solidFill>
+                  </a:tcPr>
+                </a:tc>
+                <a:tc>
+                  <a:txBody>
+                    <a:bodyPr/>
+                    <a:lstStyle/>
+                    <a:p>
+                      <a:pPr algn="l" indent="0" marL="0">
+                        <a:buNone/>
+                      </a:pPr>
+                      <a:r>
+                        <a:rPr lang="en-US" sz="1100" dirty="0">
+                          <a:solidFill>
+                            <a:srgbClr val="1A2230"/>
+                          </a:solidFill>
+                          <a:latin typeface="Calibri" pitchFamily="34" charset="0"/>
+                          <a:ea typeface="Calibri" pitchFamily="34" charset="-122"/>
+                          <a:cs typeface="Calibri" pitchFamily="34" charset="-120"/>
+                        </a:rPr>
+                        <a:t>What does the attack give up per unit of probe evasion?</a:t>
+                      </a:r>
+                      <a:endParaRPr lang="en-US" sz="1100" dirty="0">
+                        <a:latin typeface="Calibri" charset="0"/>
+                        <a:ea typeface="Calibri" charset="0"/>
+                        <a:cs typeface="Calibri" charset="0"/>
+                      </a:endParaRPr>
+                    </a:p>
+                  </a:txBody>
+                  <a:tcPr marL="91440" marR="91440" marT="45720" marB="45720">
+                    <a:lnL w="0" cap="flat" cmpd="sng" algn="ctr">
+                      <a:noFill/>
+                    </a:lnL>
+                    <a:lnR w="0" cap="flat" cmpd="sng" algn="ctr">
+                      <a:noFill/>
+                    </a:lnR>
+                    <a:lnT w="0" cap="flat" cmpd="sng" algn="ctr">
+                      <a:noFill/>
+                    </a:lnT>
+                    <a:lnB w="6350" cap="flat" cmpd="sng" algn="ctr">
+                      <a:solidFill>
+                        <a:srgbClr val="D7DEE4"/>
+                      </a:solidFill>
+                      <a:prstDash val="solid"/>
+                      <a:round/>
+                      <a:headEnd type="none" w="med" len="med"/>
+                      <a:tailEnd type="none" w="med" len="med"/>
+                    </a:lnB>
+                    <a:solidFill>
+                      <a:srgbClr val="F7E9E1"/>
+                    </a:solidFill>
+                  </a:tcPr>
+                </a:tc>
+              </a:tr>
+              <a:tr h="621792">
+                <a:tc>
+                  <a:txBody>
+                    <a:bodyPr/>
+                    <a:lstStyle/>
+                    <a:p>
+                      <a:pPr algn="l" indent="0" marL="0">
+                        <a:buNone/>
+                      </a:pPr>
+                      <a:r>
+                        <a:rPr lang="en-US" sz="1100" b="1" dirty="0">
+                          <a:solidFill>
+                            <a:srgbClr val="6B7A88"/>
+                          </a:solidFill>
+                          <a:latin typeface="Calibri" pitchFamily="34" charset="0"/>
+                          <a:ea typeface="Calibri" pitchFamily="34" charset="-122"/>
+                          <a:cs typeface="Calibri" pitchFamily="34" charset="-120"/>
+                        </a:rPr>
+                        <a:t>Model, read-out</a:t>
+                      </a:r>
+                      <a:endParaRPr lang="en-US" sz="1100" dirty="0">
+                        <a:latin typeface="Calibri" charset="0"/>
+                        <a:ea typeface="Calibri" charset="0"/>
+                        <a:cs typeface="Calibri" charset="0"/>
+                      </a:endParaRPr>
+                    </a:p>
+                  </a:txBody>
+                  <a:tcPr marL="91440" marR="91440" marT="45720" marB="45720">
+                    <a:lnL w="0" cap="flat" cmpd="sng" algn="ctr">
+                      <a:noFill/>
+                    </a:lnL>
+                    <a:lnR w="0" cap="flat" cmpd="sng" algn="ctr">
+                      <a:noFill/>
+                    </a:lnR>
+                    <a:lnT w="0" cap="flat" cmpd="sng" algn="ctr">
+                      <a:noFill/>
+                    </a:lnT>
+                    <a:lnB w="6350" cap="flat" cmpd="sng" algn="ctr">
+                      <a:solidFill>
+                        <a:srgbClr val="D7DEE4"/>
+                      </a:solidFill>
+                      <a:prstDash val="solid"/>
+                      <a:round/>
+                      <a:headEnd type="none" w="med" len="med"/>
+                      <a:tailEnd type="none" w="med" len="med"/>
+                    </a:lnB>
+                    <a:solidFill>
+                      <a:srgbClr val="FFFFFF"/>
+                    </a:solidFill>
+                  </a:tcPr>
+                </a:tc>
+                <a:tc>
+                  <a:txBody>
+                    <a:bodyPr/>
+                    <a:lstStyle/>
+                    <a:p>
+                      <a:pPr algn="l" indent="0" marL="0">
+                        <a:buNone/>
+                      </a:pPr>
+                      <a:r>
+                        <a:rPr lang="en-US" sz="1100" dirty="0">
+                          <a:solidFill>
+                            <a:srgbClr val="4A5663"/>
+                          </a:solidFill>
+                          <a:latin typeface="Calibri" pitchFamily="34" charset="0"/>
+                          <a:ea typeface="Calibri" pitchFamily="34" charset="-122"/>
+                          <a:cs typeface="Calibri" pitchFamily="34" charset="-120"/>
+                        </a:rPr>
+                        <a:t>Llama-3.3-70B-Instruct, residual stream after layer 22 of 80</a:t>
+                      </a:r>
+                      <a:endParaRPr lang="en-US" sz="1100" dirty="0">
+                        <a:latin typeface="Calibri" charset="0"/>
+                        <a:ea typeface="Calibri" charset="0"/>
+                        <a:cs typeface="Calibri" charset="0"/>
+                      </a:endParaRPr>
+                    </a:p>
+                  </a:txBody>
+                  <a:tcPr marL="91440" marR="91440" marT="45720" marB="45720">
+                    <a:lnL w="0" cap="flat" cmpd="sng" algn="ctr">
+                      <a:noFill/>
+                    </a:lnL>
+                    <a:lnR w="0" cap="flat" cmpd="sng" algn="ctr">
+                      <a:noFill/>
+                    </a:lnR>
+                    <a:lnT w="0" cap="flat" cmpd="sng" algn="ctr">
+                      <a:noFill/>
+                    </a:lnT>
+                    <a:lnB w="6350" cap="flat" cmpd="sng" algn="ctr">
+                      <a:solidFill>
+                        <a:srgbClr val="D7DEE4"/>
+                      </a:solidFill>
+                      <a:prstDash val="solid"/>
+                      <a:round/>
+                      <a:headEnd type="none" w="med" len="med"/>
+                      <a:tailEnd type="none" w="med" len="med"/>
+                    </a:lnB>
+                    <a:solidFill>
+                      <a:srgbClr val="FFFFFF"/>
+                    </a:solidFill>
+                  </a:tcPr>
+                </a:tc>
+                <a:tc>
+                  <a:txBody>
+                    <a:bodyPr/>
+                    <a:lstStyle/>
+                    <a:p>
+                      <a:pPr algn="l" indent="0" marL="0">
+                        <a:buNone/>
+                      </a:pPr>
+                      <a:r>
+                        <a:rPr lang="en-US" sz="1100" dirty="0">
+                          <a:solidFill>
+                            <a:srgbClr val="4A5663"/>
+                          </a:solidFill>
+                          <a:latin typeface="Calibri" pitchFamily="34" charset="0"/>
+                          <a:ea typeface="Calibri" pitchFamily="34" charset="-122"/>
+                          <a:cs typeface="Calibri" pitchFamily="34" charset="-120"/>
+                        </a:rPr>
+                        <a:t>Llama-3-8B-Instruct, plus Circuit Breakers and LAT</a:t>
+                      </a:r>
+                      <a:endParaRPr lang="en-US" sz="1100" dirty="0">
+                        <a:latin typeface="Calibri" charset="0"/>
+                        <a:ea typeface="Calibri" charset="0"/>
+                        <a:cs typeface="Calibri" charset="0"/>
+                      </a:endParaRPr>
+                    </a:p>
+                  </a:txBody>
+                  <a:tcPr marL="91440" marR="91440" marT="45720" marB="45720">
+                    <a:lnL w="0" cap="flat" cmpd="sng" algn="ctr">
+                      <a:noFill/>
+                    </a:lnL>
+                    <a:lnR w="0" cap="flat" cmpd="sng" algn="ctr">
+                      <a:noFill/>
+                    </a:lnR>
+                    <a:lnT w="0" cap="flat" cmpd="sng" algn="ctr">
+                      <a:noFill/>
+                    </a:lnT>
+                    <a:lnB w="6350" cap="flat" cmpd="sng" algn="ctr">
+                      <a:solidFill>
+                        <a:srgbClr val="D7DEE4"/>
+                      </a:solidFill>
+                      <a:prstDash val="solid"/>
+                      <a:round/>
+                      <a:headEnd type="none" w="med" len="med"/>
+                      <a:tailEnd type="none" w="med" len="med"/>
+                    </a:lnB>
+                    <a:solidFill>
+                      <a:srgbClr val="FFFFFF"/>
+                    </a:solidFill>
+                  </a:tcPr>
+                </a:tc>
+                <a:tc>
+                  <a:txBody>
+                    <a:bodyPr/>
+                    <a:lstStyle/>
+                    <a:p>
+                      <a:pPr algn="l" indent="0" marL="0">
+                        <a:buNone/>
+                      </a:pPr>
+                      <a:r>
+                        <a:rPr lang="en-US" sz="1100" dirty="0">
+                          <a:solidFill>
+                            <a:srgbClr val="4A5663"/>
+                          </a:solidFill>
+                          <a:latin typeface="Calibri" pitchFamily="34" charset="0"/>
+                          <a:ea typeface="Calibri" pitchFamily="34" charset="-122"/>
+                          <a:cs typeface="Calibri" pitchFamily="34" charset="-120"/>
+                        </a:rPr>
+                        <a:t>Llama-2-7B, Llama-3-8B, Qwen-2.5-14B, guardrails removed</a:t>
+                      </a:r>
+                      <a:endParaRPr lang="en-US" sz="1100" dirty="0">
+                        <a:latin typeface="Calibri" charset="0"/>
+                        <a:ea typeface="Calibri" charset="0"/>
+                        <a:cs typeface="Calibri" charset="0"/>
+                      </a:endParaRPr>
+                    </a:p>
+                  </a:txBody>
+                  <a:tcPr marL="91440" marR="91440" marT="45720" marB="45720">
+                    <a:lnL w="0" cap="flat" cmpd="sng" algn="ctr">
+                      <a:noFill/>
+                    </a:lnL>
+                    <a:lnR w="0" cap="flat" cmpd="sng" algn="ctr">
+                      <a:noFill/>
+                    </a:lnR>
+                    <a:lnT w="0" cap="flat" cmpd="sng" algn="ctr">
+                      <a:noFill/>
+                    </a:lnT>
+                    <a:lnB w="6350" cap="flat" cmpd="sng" algn="ctr">
+                      <a:solidFill>
+                        <a:srgbClr val="D7DEE4"/>
+                      </a:solidFill>
+                      <a:prstDash val="solid"/>
+                      <a:round/>
+                      <a:headEnd type="none" w="med" len="med"/>
+                      <a:tailEnd type="none" w="med" len="med"/>
+                    </a:lnB>
+                    <a:solidFill>
+                      <a:srgbClr val="FFFFFF"/>
+                    </a:solidFill>
+                  </a:tcPr>
+                </a:tc>
+                <a:tc>
+                  <a:txBody>
+                    <a:bodyPr/>
+                    <a:lstStyle/>
+                    <a:p>
+                      <a:pPr algn="l" indent="0" marL="0">
+                        <a:buNone/>
+                      </a:pPr>
+                      <a:r>
+                        <a:rPr lang="en-US" sz="1100" dirty="0">
+                          <a:solidFill>
+                            <a:srgbClr val="1A2230"/>
+                          </a:solidFill>
+                          <a:latin typeface="Calibri" pitchFamily="34" charset="0"/>
+                          <a:ea typeface="Calibri" pitchFamily="34" charset="-122"/>
+                          <a:cs typeface="Calibri" pitchFamily="34" charset="-120"/>
+                        </a:rPr>
+                        <a:t>Qwen3.5-4B, reasoning off. Probe layer 20, transfer layer 28</a:t>
+                      </a:r>
+                      <a:endParaRPr lang="en-US" sz="1100" dirty="0">
+                        <a:latin typeface="Calibri" charset="0"/>
+                        <a:ea typeface="Calibri" charset="0"/>
+                        <a:cs typeface="Calibri" charset="0"/>
+                      </a:endParaRPr>
+                    </a:p>
+                  </a:txBody>
+                  <a:tcPr marL="91440" marR="91440" marT="45720" marB="45720">
+                    <a:lnL w="0" cap="flat" cmpd="sng" algn="ctr">
+                      <a:noFill/>
+                    </a:lnL>
+                    <a:lnR w="0" cap="flat" cmpd="sng" algn="ctr">
+                      <a:noFill/>
+                    </a:lnR>
+                    <a:lnT w="0" cap="flat" cmpd="sng" algn="ctr">
+                      <a:noFill/>
+                    </a:lnT>
+                    <a:lnB w="6350" cap="flat" cmpd="sng" algn="ctr">
+                      <a:solidFill>
+                        <a:srgbClr val="D7DEE4"/>
+                      </a:solidFill>
+                      <a:prstDash val="solid"/>
+                      <a:round/>
+                      <a:headEnd type="none" w="med" len="med"/>
+                      <a:tailEnd type="none" w="med" len="med"/>
+                    </a:lnB>
+                    <a:solidFill>
+                      <a:srgbClr val="F7E9E1"/>
+                    </a:solidFill>
+                  </a:tcPr>
+                </a:tc>
+              </a:tr>
+              <a:tr h="621792">
+                <a:tc>
+                  <a:txBody>
+                    <a:bodyPr/>
+                    <a:lstStyle/>
+                    <a:p>
+                      <a:pPr algn="l" indent="0" marL="0">
+                        <a:buNone/>
+                      </a:pPr>
+                      <a:r>
+                        <a:rPr lang="en-US" sz="1100" b="1" dirty="0">
+                          <a:solidFill>
+                            <a:srgbClr val="6B7A88"/>
+                          </a:solidFill>
+                          <a:latin typeface="Calibri" pitchFamily="34" charset="0"/>
+                          <a:ea typeface="Calibri" pitchFamily="34" charset="-122"/>
+                          <a:cs typeface="Calibri" pitchFamily="34" charset="-120"/>
+                        </a:rPr>
+                        <a:t>Data</a:t>
+                      </a:r>
+                      <a:endParaRPr lang="en-US" sz="1100" dirty="0">
+                        <a:latin typeface="Calibri" charset="0"/>
+                        <a:ea typeface="Calibri" charset="0"/>
+                        <a:cs typeface="Calibri" charset="0"/>
+                      </a:endParaRPr>
+                    </a:p>
+                  </a:txBody>
+                  <a:tcPr marL="91440" marR="91440" marT="45720" marB="45720">
+                    <a:lnL w="0" cap="flat" cmpd="sng" algn="ctr">
+                      <a:noFill/>
+                    </a:lnL>
+                    <a:lnR w="0" cap="flat" cmpd="sng" algn="ctr">
+                      <a:noFill/>
+                    </a:lnR>
+                    <a:lnT w="0" cap="flat" cmpd="sng" algn="ctr">
+                      <a:noFill/>
+                    </a:lnT>
+                    <a:lnB w="6350" cap="flat" cmpd="sng" algn="ctr">
+                      <a:solidFill>
+                        <a:srgbClr val="D7DEE4"/>
+                      </a:solidFill>
+                      <a:prstDash val="solid"/>
+                      <a:round/>
+                      <a:headEnd type="none" w="med" len="med"/>
+                      <a:tailEnd type="none" w="med" len="med"/>
+                    </a:lnB>
+                    <a:solidFill>
+                      <a:srgbClr val="FFFFFF"/>
+                    </a:solidFill>
+                  </a:tcPr>
+                </a:tc>
+                <a:tc>
+                  <a:txBody>
+                    <a:bodyPr/>
+                    <a:lstStyle/>
+                    <a:p>
+                      <a:pPr algn="l" indent="0" marL="0">
+                        <a:buNone/>
+                      </a:pPr>
+                      <a:r>
+                        <a:rPr lang="en-US" sz="1100" dirty="0">
+                          <a:solidFill>
+                            <a:srgbClr val="4A5663"/>
+                          </a:solidFill>
+                          <a:latin typeface="Calibri" pitchFamily="34" charset="0"/>
+                          <a:ea typeface="Calibri" pitchFamily="34" charset="-122"/>
+                          <a:cs typeface="Calibri" pitchFamily="34" charset="-120"/>
+                        </a:rPr>
+                        <a:t>Roleplaying, insider trading, and sandbagging from Anthropic's sabotage evals</a:t>
+                      </a:r>
+                      <a:endParaRPr lang="en-US" sz="1100" dirty="0">
+                        <a:latin typeface="Calibri" charset="0"/>
+                        <a:ea typeface="Calibri" charset="0"/>
+                        <a:cs typeface="Calibri" charset="0"/>
+                      </a:endParaRPr>
+                    </a:p>
+                  </a:txBody>
+                  <a:tcPr marL="91440" marR="91440" marT="45720" marB="45720">
+                    <a:lnL w="0" cap="flat" cmpd="sng" algn="ctr">
+                      <a:noFill/>
+                    </a:lnL>
+                    <a:lnR w="0" cap="flat" cmpd="sng" algn="ctr">
+                      <a:noFill/>
+                    </a:lnR>
+                    <a:lnT w="0" cap="flat" cmpd="sng" algn="ctr">
+                      <a:noFill/>
+                    </a:lnT>
+                    <a:lnB w="6350" cap="flat" cmpd="sng" algn="ctr">
+                      <a:solidFill>
+                        <a:srgbClr val="D7DEE4"/>
+                      </a:solidFill>
+                      <a:prstDash val="solid"/>
+                      <a:round/>
+                      <a:headEnd type="none" w="med" len="med"/>
+                      <a:tailEnd type="none" w="med" len="med"/>
+                    </a:lnB>
+                    <a:solidFill>
+                      <a:srgbClr val="FFFFFF"/>
+                    </a:solidFill>
+                  </a:tcPr>
+                </a:tc>
+                <a:tc>
+                  <a:txBody>
+                    <a:bodyPr/>
+                    <a:lstStyle/>
+                    <a:p>
+                      <a:pPr algn="l" indent="0" marL="0">
+                        <a:buNone/>
+                      </a:pPr>
+                      <a:r>
+                        <a:rPr lang="en-US" sz="1100" dirty="0">
+                          <a:solidFill>
+                            <a:srgbClr val="4A5663"/>
+                          </a:solidFill>
+                          <a:latin typeface="Calibri" pitchFamily="34" charset="0"/>
+                          <a:ea typeface="Calibri" pitchFamily="34" charset="-122"/>
+                          <a:cs typeface="Calibri" pitchFamily="34" charset="-120"/>
+                        </a:rPr>
+                        <a:t>Jailbreak instruction sets, backdoor poisoning, and SQL writing</a:t>
+                      </a:r>
+                      <a:endParaRPr lang="en-US" sz="1100" dirty="0">
+                        <a:latin typeface="Calibri" charset="0"/>
+                        <a:ea typeface="Calibri" charset="0"/>
+                        <a:cs typeface="Calibri" charset="0"/>
+                      </a:endParaRPr>
+                    </a:p>
+                  </a:txBody>
+                  <a:tcPr marL="91440" marR="91440" marT="45720" marB="45720">
+                    <a:lnL w="0" cap="flat" cmpd="sng" algn="ctr">
+                      <a:noFill/>
+                    </a:lnL>
+                    <a:lnR w="0" cap="flat" cmpd="sng" algn="ctr">
+                      <a:noFill/>
+                    </a:lnR>
+                    <a:lnT w="0" cap="flat" cmpd="sng" algn="ctr">
+                      <a:noFill/>
+                    </a:lnT>
+                    <a:lnB w="6350" cap="flat" cmpd="sng" algn="ctr">
+                      <a:solidFill>
+                        <a:srgbClr val="D7DEE4"/>
+                      </a:solidFill>
+                      <a:prstDash val="solid"/>
+                      <a:round/>
+                      <a:headEnd type="none" w="med" len="med"/>
+                      <a:tailEnd type="none" w="med" len="med"/>
+                    </a:lnB>
+                    <a:solidFill>
+                      <a:srgbClr val="FFFFFF"/>
+                    </a:solidFill>
+                  </a:tcPr>
+                </a:tc>
+                <a:tc>
+                  <a:txBody>
+                    <a:bodyPr/>
+                    <a:lstStyle/>
+                    <a:p>
+                      <a:pPr algn="l" indent="0" marL="0">
+                        <a:buNone/>
+                      </a:pPr>
+                      <a:r>
+                        <a:rPr lang="en-US" sz="1100" dirty="0">
+                          <a:solidFill>
+                            <a:srgbClr val="4A5663"/>
+                          </a:solidFill>
+                          <a:latin typeface="Calibri" pitchFamily="34" charset="0"/>
+                          <a:ea typeface="Calibri" pitchFamily="34" charset="-122"/>
+                          <a:cs typeface="Calibri" pitchFamily="34" charset="-120"/>
+                        </a:rPr>
+                        <a:t>Harmful prompts graded by StrongREJECT, split by a trigger phrase</a:t>
+                      </a:r>
+                      <a:endParaRPr lang="en-US" sz="1100" dirty="0">
+                        <a:latin typeface="Calibri" charset="0"/>
+                        <a:ea typeface="Calibri" charset="0"/>
+                        <a:cs typeface="Calibri" charset="0"/>
+                      </a:endParaRPr>
+                    </a:p>
+                  </a:txBody>
+                  <a:tcPr marL="91440" marR="91440" marT="45720" marB="45720">
+                    <a:lnL w="0" cap="flat" cmpd="sng" algn="ctr">
+                      <a:noFill/>
+                    </a:lnL>
+                    <a:lnR w="0" cap="flat" cmpd="sng" algn="ctr">
+                      <a:noFill/>
+                    </a:lnR>
+                    <a:lnT w="0" cap="flat" cmpd="sng" algn="ctr">
+                      <a:noFill/>
+                    </a:lnT>
+                    <a:lnB w="6350" cap="flat" cmpd="sng" algn="ctr">
+                      <a:solidFill>
+                        <a:srgbClr val="D7DEE4"/>
+                      </a:solidFill>
+                      <a:prstDash val="solid"/>
+                      <a:round/>
+                      <a:headEnd type="none" w="med" len="med"/>
+                      <a:tailEnd type="none" w="med" len="med"/>
+                    </a:lnB>
+                    <a:solidFill>
+                      <a:srgbClr val="FFFFFF"/>
+                    </a:solidFill>
+                  </a:tcPr>
+                </a:tc>
+                <a:tc>
+                  <a:txBody>
+                    <a:bodyPr/>
+                    <a:lstStyle/>
+                    <a:p>
+                      <a:pPr algn="l" indent="0" marL="0">
+                        <a:buNone/>
+                      </a:pPr>
+                      <a:r>
+                        <a:rPr lang="en-US" sz="1100" dirty="0">
+                          <a:solidFill>
+                            <a:srgbClr val="1A2230"/>
+                          </a:solidFill>
+                          <a:latin typeface="Calibri" pitchFamily="34" charset="0"/>
+                          <a:ea typeface="Calibri" pitchFamily="34" charset="-122"/>
+                          <a:cs typeface="Calibri" pitchFamily="34" charset="-120"/>
+                        </a:rPr>
+                        <a:t>MBPP, 300 problems, two prompts each, official asserts run in a subprocess</a:t>
+                      </a:r>
+                      <a:endParaRPr lang="en-US" sz="1100" dirty="0">
+                        <a:latin typeface="Calibri" charset="0"/>
+                        <a:ea typeface="Calibri" charset="0"/>
+                        <a:cs typeface="Calibri" charset="0"/>
+                      </a:endParaRPr>
+                    </a:p>
+                  </a:txBody>
+                  <a:tcPr marL="91440" marR="91440" marT="45720" marB="45720">
+                    <a:lnL w="0" cap="flat" cmpd="sng" algn="ctr">
+                      <a:noFill/>
+                    </a:lnL>
+                    <a:lnR w="0" cap="flat" cmpd="sng" algn="ctr">
+                      <a:noFill/>
+                    </a:lnR>
+                    <a:lnT w="0" cap="flat" cmpd="sng" algn="ctr">
+                      <a:noFill/>
+                    </a:lnT>
+                    <a:lnB w="6350" cap="flat" cmpd="sng" algn="ctr">
+                      <a:solidFill>
+                        <a:srgbClr val="D7DEE4"/>
+                      </a:solidFill>
+                      <a:prstDash val="solid"/>
+                      <a:round/>
+                      <a:headEnd type="none" w="med" len="med"/>
+                      <a:tailEnd type="none" w="med" len="med"/>
+                    </a:lnB>
+                    <a:solidFill>
+                      <a:srgbClr val="F7E9E1"/>
+                    </a:solidFill>
+                  </a:tcPr>
+                </a:tc>
+              </a:tr>
+              <a:tr h="621792">
+                <a:tc>
+                  <a:txBody>
+                    <a:bodyPr/>
+                    <a:lstStyle/>
+                    <a:p>
+                      <a:pPr algn="l" indent="0" marL="0">
+                        <a:buNone/>
+                      </a:pPr>
+                      <a:r>
+                        <a:rPr lang="en-US" sz="1100" b="1" dirty="0">
+                          <a:solidFill>
+                            <a:srgbClr val="6B7A88"/>
+                          </a:solidFill>
+                          <a:latin typeface="Calibri" pitchFamily="34" charset="0"/>
+                          <a:ea typeface="Calibri" pitchFamily="34" charset="-122"/>
+                          <a:cs typeface="Calibri" pitchFamily="34" charset="-120"/>
+                        </a:rPr>
+                        <a:t>Detection metric</a:t>
+                      </a:r>
+                      <a:endParaRPr lang="en-US" sz="1100" dirty="0">
+                        <a:latin typeface="Calibri" charset="0"/>
+                        <a:ea typeface="Calibri" charset="0"/>
+                        <a:cs typeface="Calibri" charset="0"/>
+                      </a:endParaRPr>
+                    </a:p>
+                  </a:txBody>
+                  <a:tcPr marL="91440" marR="91440" marT="45720" marB="45720">
+                    <a:lnL w="0" cap="flat" cmpd="sng" algn="ctr">
+                      <a:noFill/>
+                    </a:lnL>
+                    <a:lnR w="0" cap="flat" cmpd="sng" algn="ctr">
+                      <a:noFill/>
+                    </a:lnR>
+                    <a:lnT w="0" cap="flat" cmpd="sng" algn="ctr">
+                      <a:noFill/>
+                    </a:lnT>
+                    <a:lnB w="6350" cap="flat" cmpd="sng" algn="ctr">
+                      <a:solidFill>
+                        <a:srgbClr val="D7DEE4"/>
+                      </a:solidFill>
+                      <a:prstDash val="solid"/>
+                      <a:round/>
+                      <a:headEnd type="none" w="med" len="med"/>
+                      <a:tailEnd type="none" w="med" len="med"/>
+                    </a:lnB>
+                    <a:solidFill>
+                      <a:srgbClr val="FFFFFF"/>
+                    </a:solidFill>
+                  </a:tcPr>
+                </a:tc>
+                <a:tc>
+                  <a:txBody>
+                    <a:bodyPr/>
+                    <a:lstStyle/>
+                    <a:p>
+                      <a:pPr algn="l" indent="0" marL="0">
+                        <a:buNone/>
+                      </a:pPr>
+                      <a:r>
+                        <a:rPr lang="en-US" sz="1100" dirty="0">
+                          <a:solidFill>
+                            <a:srgbClr val="4A5663"/>
+                          </a:solidFill>
+                          <a:latin typeface="Calibri" pitchFamily="34" charset="0"/>
+                          <a:ea typeface="Calibri" pitchFamily="34" charset="-122"/>
+                          <a:cs typeface="Calibri" pitchFamily="34" charset="-120"/>
+                        </a:rPr>
+                        <a:t>AUROC per set, recall at 1% FPR, and recall two layers away</a:t>
+                      </a:r>
+                      <a:endParaRPr lang="en-US" sz="1100" dirty="0">
+                        <a:latin typeface="Calibri" charset="0"/>
+                        <a:ea typeface="Calibri" charset="0"/>
+                        <a:cs typeface="Calibri" charset="0"/>
+                      </a:endParaRPr>
+                    </a:p>
+                  </a:txBody>
+                  <a:tcPr marL="91440" marR="91440" marT="45720" marB="45720">
+                    <a:lnL w="0" cap="flat" cmpd="sng" algn="ctr">
+                      <a:noFill/>
+                    </a:lnL>
+                    <a:lnR w="0" cap="flat" cmpd="sng" algn="ctr">
+                      <a:noFill/>
+                    </a:lnR>
+                    <a:lnT w="0" cap="flat" cmpd="sng" algn="ctr">
+                      <a:noFill/>
+                    </a:lnT>
+                    <a:lnB w="6350" cap="flat" cmpd="sng" algn="ctr">
+                      <a:solidFill>
+                        <a:srgbClr val="D7DEE4"/>
+                      </a:solidFill>
+                      <a:prstDash val="solid"/>
+                      <a:round/>
+                      <a:headEnd type="none" w="med" len="med"/>
+                      <a:tailEnd type="none" w="med" len="med"/>
+                    </a:lnB>
+                    <a:solidFill>
+                      <a:srgbClr val="FFFFFF"/>
+                    </a:solidFill>
+                  </a:tcPr>
+                </a:tc>
+                <a:tc>
+                  <a:txBody>
+                    <a:bodyPr/>
+                    <a:lstStyle/>
+                    <a:p>
+                      <a:pPr algn="l" indent="0" marL="0">
+                        <a:buNone/>
+                      </a:pPr>
+                      <a:r>
+                        <a:rPr lang="en-US" sz="1100" dirty="0">
+                          <a:solidFill>
+                            <a:srgbClr val="4A5663"/>
+                          </a:solidFill>
+                          <a:latin typeface="Calibri" pitchFamily="34" charset="0"/>
+                          <a:ea typeface="Calibri" pitchFamily="34" charset="-122"/>
+                          <a:cs typeface="Calibri" pitchFamily="34" charset="-120"/>
+                        </a:rPr>
+                        <a:t>Recall at 1% FPR across probes, OOD detectors and SAEs, plus transfer</a:t>
+                      </a:r>
+                      <a:endParaRPr lang="en-US" sz="1100" dirty="0">
+                        <a:latin typeface="Calibri" charset="0"/>
+                        <a:ea typeface="Calibri" charset="0"/>
+                        <a:cs typeface="Calibri" charset="0"/>
+                      </a:endParaRPr>
+                    </a:p>
+                  </a:txBody>
+                  <a:tcPr marL="91440" marR="91440" marT="45720" marB="45720">
+                    <a:lnL w="0" cap="flat" cmpd="sng" algn="ctr">
+                      <a:noFill/>
+                    </a:lnL>
+                    <a:lnR w="0" cap="flat" cmpd="sng" algn="ctr">
+                      <a:noFill/>
+                    </a:lnR>
+                    <a:lnT w="0" cap="flat" cmpd="sng" algn="ctr">
+                      <a:noFill/>
+                    </a:lnT>
+                    <a:lnB w="6350" cap="flat" cmpd="sng" algn="ctr">
+                      <a:solidFill>
+                        <a:srgbClr val="D7DEE4"/>
+                      </a:solidFill>
+                      <a:prstDash val="solid"/>
+                      <a:round/>
+                      <a:headEnd type="none" w="med" len="med"/>
+                      <a:tailEnd type="none" w="med" len="med"/>
+                    </a:lnB>
+                    <a:solidFill>
+                      <a:srgbClr val="FFFFFF"/>
+                    </a:solidFill>
+                  </a:tcPr>
+                </a:tc>
+                <a:tc>
+                  <a:txBody>
+                    <a:bodyPr/>
+                    <a:lstStyle/>
+                    <a:p>
+                      <a:pPr algn="l" indent="0" marL="0">
+                        <a:buNone/>
+                      </a:pPr>
+                      <a:r>
+                        <a:rPr lang="en-US" sz="1100" dirty="0">
+                          <a:solidFill>
+                            <a:srgbClr val="4A5663"/>
+                          </a:solidFill>
+                          <a:latin typeface="Calibri" pitchFamily="34" charset="0"/>
+                          <a:ea typeface="Calibri" pitchFamily="34" charset="-122"/>
+                          <a:cs typeface="Calibri" pitchFamily="34" charset="-120"/>
+                        </a:rPr>
+                        <a:t>Evasion rate at 1% FPR by probe type and pooling</a:t>
+                      </a:r>
+                      <a:endParaRPr lang="en-US" sz="1100" dirty="0">
+                        <a:latin typeface="Calibri" charset="0"/>
+                        <a:ea typeface="Calibri" charset="0"/>
+                        <a:cs typeface="Calibri" charset="0"/>
+                      </a:endParaRPr>
+                    </a:p>
+                  </a:txBody>
+                  <a:tcPr marL="91440" marR="91440" marT="45720" marB="45720">
+                    <a:lnL w="0" cap="flat" cmpd="sng" algn="ctr">
+                      <a:noFill/>
+                    </a:lnL>
+                    <a:lnR w="0" cap="flat" cmpd="sng" algn="ctr">
+                      <a:noFill/>
+                    </a:lnR>
+                    <a:lnT w="0" cap="flat" cmpd="sng" algn="ctr">
+                      <a:noFill/>
+                    </a:lnT>
+                    <a:lnB w="6350" cap="flat" cmpd="sng" algn="ctr">
+                      <a:solidFill>
+                        <a:srgbClr val="D7DEE4"/>
+                      </a:solidFill>
+                      <a:prstDash val="solid"/>
+                      <a:round/>
+                      <a:headEnd type="none" w="med" len="med"/>
+                      <a:tailEnd type="none" w="med" len="med"/>
+                    </a:lnB>
+                    <a:solidFill>
+                      <a:srgbClr val="FFFFFF"/>
+                    </a:solidFill>
+                  </a:tcPr>
+                </a:tc>
+                <a:tc>
+                  <a:txBody>
+                    <a:bodyPr/>
+                    <a:lstStyle/>
+                    <a:p>
+                      <a:pPr algn="l" indent="0" marL="0">
+                        <a:buNone/>
+                      </a:pPr>
+                      <a:r>
+                        <a:rPr lang="en-US" sz="1100" dirty="0">
+                          <a:solidFill>
+                            <a:srgbClr val="1A2230"/>
+                          </a:solidFill>
+                          <a:latin typeface="Calibri" pitchFamily="34" charset="0"/>
+                          <a:ea typeface="Calibri" pitchFamily="34" charset="-122"/>
+                          <a:cs typeface="Calibri" pitchFamily="34" charset="-120"/>
+                        </a:rPr>
+                        <a:t>One-sided and two-sided AUROC, TPR at 1% FPR, transfer at an unsteered layer, the defender's number</a:t>
+                      </a:r>
+                      <a:endParaRPr lang="en-US" sz="1100" dirty="0">
+                        <a:latin typeface="Calibri" charset="0"/>
+                        <a:ea typeface="Calibri" charset="0"/>
+                        <a:cs typeface="Calibri" charset="0"/>
+                      </a:endParaRPr>
+                    </a:p>
+                  </a:txBody>
+                  <a:tcPr marL="91440" marR="91440" marT="45720" marB="45720">
+                    <a:lnL w="0" cap="flat" cmpd="sng" algn="ctr">
+                      <a:noFill/>
+                    </a:lnL>
+                    <a:lnR w="0" cap="flat" cmpd="sng" algn="ctr">
+                      <a:noFill/>
+                    </a:lnR>
+                    <a:lnT w="0" cap="flat" cmpd="sng" algn="ctr">
+                      <a:noFill/>
+                    </a:lnT>
+                    <a:lnB w="6350" cap="flat" cmpd="sng" algn="ctr">
+                      <a:solidFill>
+                        <a:srgbClr val="D7DEE4"/>
+                      </a:solidFill>
+                      <a:prstDash val="solid"/>
+                      <a:round/>
+                      <a:headEnd type="none" w="med" len="med"/>
+                      <a:tailEnd type="none" w="med" len="med"/>
+                    </a:lnB>
+                    <a:solidFill>
+                      <a:srgbClr val="F7E9E1"/>
+                    </a:solidFill>
+                  </a:tcPr>
+                </a:tc>
+              </a:tr>
+              <a:tr h="621792">
+                <a:tc>
+                  <a:txBody>
+                    <a:bodyPr/>
+                    <a:lstStyle/>
+                    <a:p>
+                      <a:pPr algn="l" indent="0" marL="0">
+                        <a:buNone/>
+                      </a:pPr>
+                      <a:r>
+                        <a:rPr lang="en-US" sz="1100" b="1" dirty="0">
+                          <a:solidFill>
+                            <a:srgbClr val="6B7A88"/>
+                          </a:solidFill>
+                          <a:latin typeface="Calibri" pitchFamily="34" charset="0"/>
+                          <a:ea typeface="Calibri" pitchFamily="34" charset="-122"/>
+                          <a:cs typeface="Calibri" pitchFamily="34" charset="-120"/>
+                        </a:rPr>
+                        <a:t>Capability metric</a:t>
+                      </a:r>
+                      <a:endParaRPr lang="en-US" sz="1100" dirty="0">
+                        <a:latin typeface="Calibri" charset="0"/>
+                        <a:ea typeface="Calibri" charset="0"/>
+                        <a:cs typeface="Calibri" charset="0"/>
+                      </a:endParaRPr>
+                    </a:p>
+                  </a:txBody>
+                  <a:tcPr marL="91440" marR="91440" marT="45720" marB="45720">
+                    <a:lnL w="0" cap="flat" cmpd="sng" algn="ctr">
+                      <a:noFill/>
+                    </a:lnL>
+                    <a:lnR w="0" cap="flat" cmpd="sng" algn="ctr">
+                      <a:noFill/>
+                    </a:lnR>
+                    <a:lnT w="0" cap="flat" cmpd="sng" algn="ctr">
+                      <a:noFill/>
+                    </a:lnT>
+                    <a:lnB w="6350" cap="flat" cmpd="sng" algn="ctr">
+                      <a:solidFill>
+                        <a:srgbClr val="D7DEE4"/>
+                      </a:solidFill>
+                      <a:prstDash val="solid"/>
+                      <a:round/>
+                      <a:headEnd type="none" w="med" len="med"/>
+                      <a:tailEnd type="none" w="med" len="med"/>
+                    </a:lnB>
+                    <a:solidFill>
+                      <a:srgbClr val="FFFFFF"/>
+                    </a:solidFill>
+                  </a:tcPr>
+                </a:tc>
+                <a:tc>
+                  <a:txBody>
+                    <a:bodyPr/>
+                    <a:lstStyle/>
+                    <a:p>
+                      <a:pPr algn="l" indent="0" marL="0">
+                        <a:buNone/>
+                      </a:pPr>
+                      <a:r>
+                        <a:rPr lang="en-US" sz="1100" dirty="0">
+                          <a:solidFill>
+                            <a:srgbClr val="4A5663"/>
+                          </a:solidFill>
+                          <a:latin typeface="Calibri" pitchFamily="34" charset="0"/>
+                          <a:ea typeface="Calibri" pitchFamily="34" charset="-122"/>
+                          <a:cs typeface="Calibri" pitchFamily="34" charset="-120"/>
+                        </a:rPr>
+                        <a:t>None. The model is not evading, so nothing is traded</a:t>
+                      </a:r>
+                      <a:endParaRPr lang="en-US" sz="1100" dirty="0">
+                        <a:latin typeface="Calibri" charset="0"/>
+                        <a:ea typeface="Calibri" charset="0"/>
+                        <a:cs typeface="Calibri" charset="0"/>
+                      </a:endParaRPr>
+                    </a:p>
+                  </a:txBody>
+                  <a:tcPr marL="91440" marR="91440" marT="45720" marB="45720">
+                    <a:lnL w="0" cap="flat" cmpd="sng" algn="ctr">
+                      <a:noFill/>
+                    </a:lnL>
+                    <a:lnR w="0" cap="flat" cmpd="sng" algn="ctr">
+                      <a:noFill/>
+                    </a:lnR>
+                    <a:lnT w="0" cap="flat" cmpd="sng" algn="ctr">
+                      <a:noFill/>
+                    </a:lnT>
+                    <a:lnB w="6350" cap="flat" cmpd="sng" algn="ctr">
+                      <a:solidFill>
+                        <a:srgbClr val="D7DEE4"/>
+                      </a:solidFill>
+                      <a:prstDash val="solid"/>
+                      <a:round/>
+                      <a:headEnd type="none" w="med" len="med"/>
+                      <a:tailEnd type="none" w="med" len="med"/>
+                    </a:lnB>
+                    <a:solidFill>
+                      <a:srgbClr val="FFFFFF"/>
+                    </a:solidFill>
+                  </a:tcPr>
+                </a:tc>
+                <a:tc>
+                  <a:txBody>
+                    <a:bodyPr/>
+                    <a:lstStyle/>
+                    <a:p>
+                      <a:pPr algn="l" indent="0" marL="0">
+                        <a:buNone/>
+                      </a:pPr>
+                      <a:r>
+                        <a:rPr lang="en-US" sz="1100" dirty="0">
+                          <a:solidFill>
+                            <a:srgbClr val="4A5663"/>
+                          </a:solidFill>
+                          <a:latin typeface="Calibri" pitchFamily="34" charset="0"/>
+                          <a:ea typeface="Calibri" pitchFamily="34" charset="-122"/>
+                          <a:cs typeface="Calibri" pitchFamily="34" charset="-120"/>
+                        </a:rPr>
+                        <a:t>Jailbreak success rate. SQL performance called reduced, no number</a:t>
+                      </a:r>
+                      <a:endParaRPr lang="en-US" sz="1100" dirty="0">
+                        <a:latin typeface="Calibri" charset="0"/>
+                        <a:ea typeface="Calibri" charset="0"/>
+                        <a:cs typeface="Calibri" charset="0"/>
+                      </a:endParaRPr>
+                    </a:p>
+                  </a:txBody>
+                  <a:tcPr marL="91440" marR="91440" marT="45720" marB="45720">
+                    <a:lnL w="0" cap="flat" cmpd="sng" algn="ctr">
+                      <a:noFill/>
+                    </a:lnL>
+                    <a:lnR w="0" cap="flat" cmpd="sng" algn="ctr">
+                      <a:noFill/>
+                    </a:lnR>
+                    <a:lnT w="0" cap="flat" cmpd="sng" algn="ctr">
+                      <a:noFill/>
+                    </a:lnT>
+                    <a:lnB w="6350" cap="flat" cmpd="sng" algn="ctr">
+                      <a:solidFill>
+                        <a:srgbClr val="D7DEE4"/>
+                      </a:solidFill>
+                      <a:prstDash val="solid"/>
+                      <a:round/>
+                      <a:headEnd type="none" w="med" len="med"/>
+                      <a:tailEnd type="none" w="med" len="med"/>
+                    </a:lnB>
+                    <a:solidFill>
+                      <a:srgbClr val="FFFFFF"/>
+                    </a:solidFill>
+                  </a:tcPr>
+                </a:tc>
+                <a:tc>
+                  <a:txBody>
+                    <a:bodyPr/>
+                    <a:lstStyle/>
+                    <a:p>
+                      <a:pPr algn="l" indent="0" marL="0">
+                        <a:buNone/>
+                      </a:pPr>
+                      <a:r>
+                        <a:rPr lang="en-US" sz="1100" dirty="0">
+                          <a:solidFill>
+                            <a:srgbClr val="4A5663"/>
+                          </a:solidFill>
+                          <a:latin typeface="Calibri" pitchFamily="34" charset="0"/>
+                          <a:ea typeface="Calibri" pitchFamily="34" charset="-122"/>
+                          <a:cs typeface="Calibri" pitchFamily="34" charset="-120"/>
+                        </a:rPr>
+                        <a:t>StrongREJECT harmfulness, held up by a quality term in the reward</a:t>
+                      </a:r>
+                      <a:endParaRPr lang="en-US" sz="1100" dirty="0">
+                        <a:latin typeface="Calibri" charset="0"/>
+                        <a:ea typeface="Calibri" charset="0"/>
+                        <a:cs typeface="Calibri" charset="0"/>
+                      </a:endParaRPr>
+                    </a:p>
+                  </a:txBody>
+                  <a:tcPr marL="91440" marR="91440" marT="45720" marB="45720">
+                    <a:lnL w="0" cap="flat" cmpd="sng" algn="ctr">
+                      <a:noFill/>
+                    </a:lnL>
+                    <a:lnR w="0" cap="flat" cmpd="sng" algn="ctr">
+                      <a:noFill/>
+                    </a:lnR>
+                    <a:lnT w="0" cap="flat" cmpd="sng" algn="ctr">
+                      <a:noFill/>
+                    </a:lnT>
+                    <a:lnB w="6350" cap="flat" cmpd="sng" algn="ctr">
+                      <a:solidFill>
+                        <a:srgbClr val="D7DEE4"/>
+                      </a:solidFill>
+                      <a:prstDash val="solid"/>
+                      <a:round/>
+                      <a:headEnd type="none" w="med" len="med"/>
+                      <a:tailEnd type="none" w="med" len="med"/>
+                    </a:lnB>
+                    <a:solidFill>
+                      <a:srgbClr val="FFFFFF"/>
+                    </a:solidFill>
+                  </a:tcPr>
+                </a:tc>
+                <a:tc>
+                  <a:txBody>
+                    <a:bodyPr/>
+                    <a:lstStyle/>
+                    <a:p>
+                      <a:pPr algn="l" indent="0" marL="0">
+                        <a:buNone/>
+                      </a:pPr>
+                      <a:r>
+                        <a:rPr lang="en-US" sz="1100" dirty="0">
+                          <a:solidFill>
+                            <a:srgbClr val="1A2230"/>
+                          </a:solidFill>
+                          <a:latin typeface="Calibri" pitchFamily="34" charset="0"/>
+                          <a:ea typeface="Calibri" pitchFamily="34" charset="-122"/>
+                          <a:cs typeface="Calibri" pitchFamily="34" charset="-120"/>
+                        </a:rPr>
+                        <a:t>Paired accuracy drop with McNemar, attack rate, and flip-set Jaccard against the unsteered run</a:t>
+                      </a:r>
+                      <a:endParaRPr lang="en-US" sz="1100" dirty="0">
+                        <a:latin typeface="Calibri" charset="0"/>
+                        <a:ea typeface="Calibri" charset="0"/>
+                        <a:cs typeface="Calibri" charset="0"/>
+                      </a:endParaRPr>
+                    </a:p>
+                  </a:txBody>
+                  <a:tcPr marL="91440" marR="91440" marT="45720" marB="45720">
+                    <a:lnL w="0" cap="flat" cmpd="sng" algn="ctr">
+                      <a:noFill/>
+                    </a:lnL>
+                    <a:lnR w="0" cap="flat" cmpd="sng" algn="ctr">
+                      <a:noFill/>
+                    </a:lnR>
+                    <a:lnT w="0" cap="flat" cmpd="sng" algn="ctr">
+                      <a:noFill/>
+                    </a:lnT>
+                    <a:lnB w="6350" cap="flat" cmpd="sng" algn="ctr">
+                      <a:solidFill>
+                        <a:srgbClr val="D7DEE4"/>
+                      </a:solidFill>
+                      <a:prstDash val="solid"/>
+                      <a:round/>
+                      <a:headEnd type="none" w="med" len="med"/>
+                      <a:tailEnd type="none" w="med" len="med"/>
+                    </a:lnB>
+                    <a:solidFill>
+                      <a:srgbClr val="F7E9E1"/>
+                    </a:solidFill>
+                  </a:tcPr>
+                </a:tc>
+              </a:tr>
+              <a:tr h="621792">
+                <a:tc>
+                  <a:txBody>
+                    <a:bodyPr/>
+                    <a:lstStyle/>
+                    <a:p>
+                      <a:pPr algn="l" indent="0" marL="0">
+                        <a:buNone/>
+                      </a:pPr>
+                      <a:r>
+                        <a:rPr lang="en-US" sz="1100" b="1" dirty="0">
+                          <a:solidFill>
+                            <a:srgbClr val="6B7A88"/>
+                          </a:solidFill>
+                          <a:latin typeface="Calibri" pitchFamily="34" charset="0"/>
+                          <a:ea typeface="Calibri" pitchFamily="34" charset="-122"/>
+                          <a:cs typeface="Calibri" pitchFamily="34" charset="-120"/>
+                        </a:rPr>
+                        <a:t>Cost elsewhere</a:t>
+                      </a:r>
+                      <a:endParaRPr lang="en-US" sz="1100" dirty="0">
+                        <a:latin typeface="Calibri" charset="0"/>
+                        <a:ea typeface="Calibri" charset="0"/>
+                        <a:cs typeface="Calibri" charset="0"/>
+                      </a:endParaRPr>
+                    </a:p>
+                  </a:txBody>
+                  <a:tcPr marL="91440" marR="91440" marT="45720" marB="45720">
+                    <a:lnL w="0" cap="flat" cmpd="sng" algn="ctr">
+                      <a:noFill/>
+                    </a:lnL>
+                    <a:lnR w="0" cap="flat" cmpd="sng" algn="ctr">
+                      <a:noFill/>
+                    </a:lnR>
+                    <a:lnT w="0" cap="flat" cmpd="sng" algn="ctr">
+                      <a:noFill/>
+                    </a:lnT>
+                    <a:lnB w="6350" cap="flat" cmpd="sng" algn="ctr">
+                      <a:solidFill>
+                        <a:srgbClr val="D7DEE4"/>
+                      </a:solidFill>
+                      <a:prstDash val="solid"/>
+                      <a:round/>
+                      <a:headEnd type="none" w="med" len="med"/>
+                      <a:tailEnd type="none" w="med" len="med"/>
+                    </a:lnB>
+                    <a:solidFill>
+                      <a:srgbClr val="FFFFFF"/>
+                    </a:solidFill>
+                  </a:tcPr>
+                </a:tc>
+                <a:tc>
+                  <a:txBody>
+                    <a:bodyPr/>
+                    <a:lstStyle/>
+                    <a:p>
+                      <a:pPr algn="l" indent="0" marL="0">
+                        <a:buNone/>
+                      </a:pPr>
+                      <a:r>
+                        <a:rPr lang="en-US" sz="1100" dirty="0">
+                          <a:solidFill>
+                            <a:srgbClr val="4A5663"/>
+                          </a:solidFill>
+                          <a:latin typeface="Calibri" pitchFamily="34" charset="0"/>
+                          <a:ea typeface="Calibri" pitchFamily="34" charset="-122"/>
+                          <a:cs typeface="Calibri" pitchFamily="34" charset="-120"/>
+                        </a:rPr>
+                        <a:t>Not applicable</a:t>
+                      </a:r>
+                      <a:endParaRPr lang="en-US" sz="1100" dirty="0">
+                        <a:latin typeface="Calibri" charset="0"/>
+                        <a:ea typeface="Calibri" charset="0"/>
+                        <a:cs typeface="Calibri" charset="0"/>
+                      </a:endParaRPr>
+                    </a:p>
+                  </a:txBody>
+                  <a:tcPr marL="91440" marR="91440" marT="45720" marB="45720">
+                    <a:lnL w="0" cap="flat" cmpd="sng" algn="ctr">
+                      <a:noFill/>
+                    </a:lnL>
+                    <a:lnR w="0" cap="flat" cmpd="sng" algn="ctr">
+                      <a:noFill/>
+                    </a:lnR>
+                    <a:lnT w="0" cap="flat" cmpd="sng" algn="ctr">
+                      <a:noFill/>
+                    </a:lnT>
+                    <a:lnB w="6350" cap="flat" cmpd="sng" algn="ctr">
+                      <a:solidFill>
+                        <a:srgbClr val="D7DEE4"/>
+                      </a:solidFill>
+                      <a:prstDash val="solid"/>
+                      <a:round/>
+                      <a:headEnd type="none" w="med" len="med"/>
+                      <a:tailEnd type="none" w="med" len="med"/>
+                    </a:lnB>
+                    <a:solidFill>
+                      <a:srgbClr val="FFFFFF"/>
+                    </a:solidFill>
+                  </a:tcPr>
+                </a:tc>
+                <a:tc>
+                  <a:txBody>
+                    <a:bodyPr/>
+                    <a:lstStyle/>
+                    <a:p>
+                      <a:pPr algn="l" indent="0" marL="0">
+                        <a:buNone/>
+                      </a:pPr>
+                      <a:r>
+                        <a:rPr lang="en-US" sz="1100" dirty="0">
+                          <a:solidFill>
+                            <a:srgbClr val="4A5663"/>
+                          </a:solidFill>
+                          <a:latin typeface="Calibri" pitchFamily="34" charset="0"/>
+                          <a:ea typeface="Calibri" pitchFamily="34" charset="-122"/>
+                          <a:cs typeface="Calibri" pitchFamily="34" charset="-120"/>
+                        </a:rPr>
+                        <a:t>Transfer to monitors never attacked</a:t>
+                      </a:r>
+                      <a:endParaRPr lang="en-US" sz="1100" dirty="0">
+                        <a:latin typeface="Calibri" charset="0"/>
+                        <a:ea typeface="Calibri" charset="0"/>
+                        <a:cs typeface="Calibri" charset="0"/>
+                      </a:endParaRPr>
+                    </a:p>
+                  </a:txBody>
+                  <a:tcPr marL="91440" marR="91440" marT="45720" marB="45720">
+                    <a:lnL w="0" cap="flat" cmpd="sng" algn="ctr">
+                      <a:noFill/>
+                    </a:lnL>
+                    <a:lnR w="0" cap="flat" cmpd="sng" algn="ctr">
+                      <a:noFill/>
+                    </a:lnR>
+                    <a:lnT w="0" cap="flat" cmpd="sng" algn="ctr">
+                      <a:noFill/>
+                    </a:lnT>
+                    <a:lnB w="6350" cap="flat" cmpd="sng" algn="ctr">
+                      <a:solidFill>
+                        <a:srgbClr val="D7DEE4"/>
+                      </a:solidFill>
+                      <a:prstDash val="solid"/>
+                      <a:round/>
+                      <a:headEnd type="none" w="med" len="med"/>
+                      <a:tailEnd type="none" w="med" len="med"/>
+                    </a:lnB>
+                    <a:solidFill>
+                      <a:srgbClr val="FFFFFF"/>
+                    </a:solidFill>
+                  </a:tcPr>
+                </a:tc>
+                <a:tc>
+                  <a:txBody>
+                    <a:bodyPr/>
+                    <a:lstStyle/>
+                    <a:p>
+                      <a:pPr algn="l" indent="0" marL="0">
+                        <a:buNone/>
+                      </a:pPr>
+                      <a:r>
+                        <a:rPr lang="en-US" sz="1100" dirty="0">
+                          <a:solidFill>
+                            <a:srgbClr val="4A5663"/>
+                          </a:solidFill>
+                          <a:latin typeface="Calibri" pitchFamily="34" charset="0"/>
+                          <a:ea typeface="Calibri" pitchFamily="34" charset="-122"/>
+                          <a:cs typeface="Calibri" pitchFamily="34" charset="-120"/>
+                        </a:rPr>
+                        <a:t>Behavioural versus internal split of the evasion</a:t>
+                      </a:r>
+                      <a:endParaRPr lang="en-US" sz="1100" dirty="0">
+                        <a:latin typeface="Calibri" charset="0"/>
+                        <a:ea typeface="Calibri" charset="0"/>
+                        <a:cs typeface="Calibri" charset="0"/>
+                      </a:endParaRPr>
+                    </a:p>
+                  </a:txBody>
+                  <a:tcPr marL="91440" marR="91440" marT="45720" marB="45720">
+                    <a:lnL w="0" cap="flat" cmpd="sng" algn="ctr">
+                      <a:noFill/>
+                    </a:lnL>
+                    <a:lnR w="0" cap="flat" cmpd="sng" algn="ctr">
+                      <a:noFill/>
+                    </a:lnR>
+                    <a:lnT w="0" cap="flat" cmpd="sng" algn="ctr">
+                      <a:noFill/>
+                    </a:lnT>
+                    <a:lnB w="6350" cap="flat" cmpd="sng" algn="ctr">
+                      <a:solidFill>
+                        <a:srgbClr val="D7DEE4"/>
+                      </a:solidFill>
+                      <a:prstDash val="solid"/>
+                      <a:round/>
+                      <a:headEnd type="none" w="med" len="med"/>
+                      <a:tailEnd type="none" w="med" len="med"/>
+                    </a:lnB>
+                    <a:solidFill>
+                      <a:srgbClr val="FFFFFF"/>
+                    </a:solidFill>
+                  </a:tcPr>
+                </a:tc>
+                <a:tc>
+                  <a:txBody>
+                    <a:bodyPr/>
+                    <a:lstStyle/>
+                    <a:p>
+                      <a:pPr algn="l" indent="0" marL="0">
+                        <a:buNone/>
+                      </a:pPr>
+                      <a:r>
+                        <a:rPr lang="en-US" sz="1100" dirty="0">
+                          <a:solidFill>
+                            <a:srgbClr val="1A2230"/>
+                          </a:solidFill>
+                          <a:latin typeface="Calibri" pitchFamily="34" charset="0"/>
+                          <a:ea typeface="Calibri" pitchFamily="34" charset="-122"/>
+                          <a:cs typeface="Calibri" pitchFamily="34" charset="-120"/>
+                        </a:rPr>
+                        <a:t>Text-only monitor suspicion, valid and degenerate rates, and the residual after the probe's arithmetic</a:t>
+                      </a:r>
+                      <a:endParaRPr lang="en-US" sz="1100" dirty="0">
+                        <a:latin typeface="Calibri" charset="0"/>
+                        <a:ea typeface="Calibri" charset="0"/>
+                        <a:cs typeface="Calibri" charset="0"/>
+                      </a:endParaRPr>
+                    </a:p>
+                  </a:txBody>
+                  <a:tcPr marL="91440" marR="91440" marT="45720" marB="45720">
+                    <a:lnL w="0" cap="flat" cmpd="sng" algn="ctr">
+                      <a:noFill/>
+                    </a:lnL>
+                    <a:lnR w="0" cap="flat" cmpd="sng" algn="ctr">
+                      <a:noFill/>
+                    </a:lnR>
+                    <a:lnT w="0" cap="flat" cmpd="sng" algn="ctr">
+                      <a:noFill/>
+                    </a:lnT>
+                    <a:lnB w="6350" cap="flat" cmpd="sng" algn="ctr">
+                      <a:solidFill>
+                        <a:srgbClr val="D7DEE4"/>
+                      </a:solidFill>
+                      <a:prstDash val="solid"/>
+                      <a:round/>
+                      <a:headEnd type="none" w="med" len="med"/>
+                      <a:tailEnd type="none" w="med" len="med"/>
+                    </a:lnB>
+                    <a:solidFill>
+                      <a:srgbClr val="F7E9E1"/>
+                    </a:solidFill>
+                  </a:tcPr>
+                </a:tc>
+              </a:tr>
+            </a:tbl>
+          </a:graphicData>
+        </a:graphic>
+      </p:graphicFrame>
+      <p:sp>
+        <p:nvSpPr>
+          <p:cNvPr id="5" name="gap-note"/>
+          <p:cNvSpPr txBox="1"/>
+          <p:nvPr/>
+        </p:nvSpPr>
+        <p:spPr>
+          <a:xfrm>
+            <a:off x="566928" y="5687568"/>
+            <a:ext cx="10607040" cy="621792"/>
+          </a:xfrm>
+          <a:prstGeom prst="rect">
+            <a:avLst/>
+          </a:prstGeom>
+          <a:noFill/>
+          <a:ln/>
+        </p:spPr>
+        <p:txBody>
+          <a:bodyPr wrap="square" lIns="0" tIns="0" rIns="0" bIns="0" rtlCol="0" anchor="t"/>
+          <a:lstStyle/>
+          <a:p>
+            <a:pPr indent="0" marL="0">
+              <a:buNone/>
+            </a:pPr>
+            <a:r>
+              <a:rPr lang="en-US" sz="1150" dirty="0">
+                <a:solidFill>
+                  <a:srgbClr val="4A5663"/>
+                </a:solidFill>
+              </a:rPr>
+              <a:t>All three ask whether evasion works, and all three answer yes. The cost is sighted twice in passing and priced by nobody, which is what the last column is for. Ours also carries four control AUROCs — within prompt against a shuffled-label null, length alone, prompt not behaviour, wrongness not intent — because a detection number means nothing until those come back near chance.</a:t>
+            </a:r>
+            <a:endParaRPr lang="en-US" sz="1150" dirty="0"/>
+          </a:p>
+        </p:txBody>
+      </p:sp>
+      <p:sp>
+        <p:nvSpPr>
+          <p:cNvPr id="6" name="source"/>
+          <p:cNvSpPr txBox="1"/>
+          <p:nvPr/>
+        </p:nvSpPr>
+        <p:spPr>
+          <a:xfrm>
+            <a:off x="566928" y="6382512"/>
+            <a:ext cx="10607040" cy="256032"/>
+          </a:xfrm>
+          <a:prstGeom prst="rect">
+            <a:avLst/>
+          </a:prstGeom>
+          <a:noFill/>
+          <a:ln/>
+        </p:spPr>
+        <p:txBody>
+          <a:bodyPr wrap="square" lIns="0" tIns="0" rIns="0" bIns="0" rtlCol="0" anchor="ctr"/>
+          <a:lstStyle/>
+          <a:p>
+            <a:pPr indent="0" marL="0">
+              <a:buNone/>
+            </a:pPr>
+            <a:r>
+              <a:rPr lang="en-US" sz="1000" dirty="0">
+                <a:solidFill>
+                  <a:srgbClr val="6B7A88"/>
+                </a:solidFill>
+              </a:rPr>
+              <a:t>Papers: arXiv:2502.03407, arXiv:2412.09565, arXiv:2506.14261. Our definitions: src/obftax/metrics.py and the metric glossary in SLIDE.md.</a:t>
+            </a:r>
+            <a:endParaRPr lang="en-US" sz="1000" dirty="0"/>
+          </a:p>
+        </p:txBody>
+      </p:sp>
+      <p:sp>
+        <p:nvSpPr>
+          <p:cNvPr id="25" name="Slide Number Placeholder 0"/>
+          <p:cNvSpPr>
+            <a:spLocks noGrp="1"/>
+          </p:cNvSpPr>
+          <p:nvPr>
+            <p:ph type="sldNum" sz="quarter" idx="4294967295"/>
+          </p:nvPr>
+        </p:nvSpPr>
+        <p:spPr>
+          <a:xfrm>
+            <a:off x="11521440" y="6382512"/>
+            <a:ext cx="457200" cy="256032"/>
+          </a:xfrm>
+          <a:prstGeom prst="rect">
+            <a:avLst/>
+          </a:prstGeom>
+        </p:spPr>
+        <p:txBody>
+          <a:bodyPr/>
+          <a:lstStyle/>
+          <a:p>
+            <a:pPr algn="r"/>
+            <a:fld id="{F7021451-1387-4CA6-816F-3879F97B5CBC}" type="slidenum">
+              <a:rPr b="0" lang="en-US"/>
+              <a:t>2</a:t>
+            </a:fld>
+            <a:endParaRPr lang="en-US"/>
           </a:p>
         </p:txBody>
       </p:sp>
